--- a/DNP3_PLC_Simulator/doc/img/designDoc.pptx
+++ b/DNP3_PLC_Simulator/doc/img/designDoc.pptx
@@ -8,8 +8,8 @@
     <p:notesMasterId r:id="rId4"/>
   </p:notesMasterIdLst>
   <p:sldIdLst>
-    <p:sldId id="257" r:id="rId2"/>
-    <p:sldId id="259" r:id="rId3"/>
+    <p:sldId id="259" r:id="rId2"/>
+    <p:sldId id="260" r:id="rId3"/>
   </p:sldIdLst>
   <p:sldSz cx="12192000" cy="6858000"/>
   <p:notesSz cx="6858000" cy="9144000"/>
@@ -198,7 +198,7 @@
           <a:p>
             <a:fld id="{01BDE586-4E23-46A7-AC89-D700B479A839}" type="datetimeFigureOut">
               <a:rPr lang="en-SG" smtClean="0"/>
-              <a:t>14/8/2026</a:t>
+              <a:t>16/8/2026</a:t>
             </a:fld>
             <a:endParaRPr lang="en-SG"/>
           </a:p>
@@ -531,7 +531,7 @@
           <a:p>
             <a:fld id="{EBF6B7D6-7851-49B5-BE5D-D00B7BAA4937}" type="slidenum">
               <a:rPr lang="en-SG" smtClean="0"/>
-              <a:t>2</a:t>
+              <a:t>1</a:t>
             </a:fld>
             <a:endParaRPr lang="en-SG"/>
           </a:p>
@@ -699,7 +699,7 @@
           <a:p>
             <a:fld id="{651D0EA0-7E1C-4898-B1CA-F30B4809AF5B}" type="datetimeFigureOut">
               <a:rPr lang="en-SG" smtClean="0"/>
-              <a:t>14/8/2026</a:t>
+              <a:t>16/8/2026</a:t>
             </a:fld>
             <a:endParaRPr lang="en-SG"/>
           </a:p>
@@ -899,7 +899,7 @@
           <a:p>
             <a:fld id="{651D0EA0-7E1C-4898-B1CA-F30B4809AF5B}" type="datetimeFigureOut">
               <a:rPr lang="en-SG" smtClean="0"/>
-              <a:t>14/8/2026</a:t>
+              <a:t>16/8/2026</a:t>
             </a:fld>
             <a:endParaRPr lang="en-SG"/>
           </a:p>
@@ -1109,7 +1109,7 @@
           <a:p>
             <a:fld id="{651D0EA0-7E1C-4898-B1CA-F30B4809AF5B}" type="datetimeFigureOut">
               <a:rPr lang="en-SG" smtClean="0"/>
-              <a:t>14/8/2026</a:t>
+              <a:t>16/8/2026</a:t>
             </a:fld>
             <a:endParaRPr lang="en-SG"/>
           </a:p>
@@ -1309,7 +1309,7 @@
           <a:p>
             <a:fld id="{651D0EA0-7E1C-4898-B1CA-F30B4809AF5B}" type="datetimeFigureOut">
               <a:rPr lang="en-SG" smtClean="0"/>
-              <a:t>14/8/2026</a:t>
+              <a:t>16/8/2026</a:t>
             </a:fld>
             <a:endParaRPr lang="en-SG"/>
           </a:p>
@@ -1585,7 +1585,7 @@
           <a:p>
             <a:fld id="{651D0EA0-7E1C-4898-B1CA-F30B4809AF5B}" type="datetimeFigureOut">
               <a:rPr lang="en-SG" smtClean="0"/>
-              <a:t>14/8/2026</a:t>
+              <a:t>16/8/2026</a:t>
             </a:fld>
             <a:endParaRPr lang="en-SG"/>
           </a:p>
@@ -1853,7 +1853,7 @@
           <a:p>
             <a:fld id="{651D0EA0-7E1C-4898-B1CA-F30B4809AF5B}" type="datetimeFigureOut">
               <a:rPr lang="en-SG" smtClean="0"/>
-              <a:t>14/8/2026</a:t>
+              <a:t>16/8/2026</a:t>
             </a:fld>
             <a:endParaRPr lang="en-SG"/>
           </a:p>
@@ -2268,7 +2268,7 @@
           <a:p>
             <a:fld id="{651D0EA0-7E1C-4898-B1CA-F30B4809AF5B}" type="datetimeFigureOut">
               <a:rPr lang="en-SG" smtClean="0"/>
-              <a:t>14/8/2026</a:t>
+              <a:t>16/8/2026</a:t>
             </a:fld>
             <a:endParaRPr lang="en-SG"/>
           </a:p>
@@ -2410,7 +2410,7 @@
           <a:p>
             <a:fld id="{651D0EA0-7E1C-4898-B1CA-F30B4809AF5B}" type="datetimeFigureOut">
               <a:rPr lang="en-SG" smtClean="0"/>
-              <a:t>14/8/2026</a:t>
+              <a:t>16/8/2026</a:t>
             </a:fld>
             <a:endParaRPr lang="en-SG"/>
           </a:p>
@@ -2523,7 +2523,7 @@
           <a:p>
             <a:fld id="{651D0EA0-7E1C-4898-B1CA-F30B4809AF5B}" type="datetimeFigureOut">
               <a:rPr lang="en-SG" smtClean="0"/>
-              <a:t>14/8/2026</a:t>
+              <a:t>16/8/2026</a:t>
             </a:fld>
             <a:endParaRPr lang="en-SG"/>
           </a:p>
@@ -2836,7 +2836,7 @@
           <a:p>
             <a:fld id="{651D0EA0-7E1C-4898-B1CA-F30B4809AF5B}" type="datetimeFigureOut">
               <a:rPr lang="en-SG" smtClean="0"/>
-              <a:t>14/8/2026</a:t>
+              <a:t>16/8/2026</a:t>
             </a:fld>
             <a:endParaRPr lang="en-SG"/>
           </a:p>
@@ -3125,7 +3125,7 @@
           <a:p>
             <a:fld id="{651D0EA0-7E1C-4898-B1CA-F30B4809AF5B}" type="datetimeFigureOut">
               <a:rPr lang="en-SG" smtClean="0"/>
-              <a:t>14/8/2026</a:t>
+              <a:t>16/8/2026</a:t>
             </a:fld>
             <a:endParaRPr lang="en-SG"/>
           </a:p>
@@ -3368,7 +3368,7 @@
           <a:p>
             <a:fld id="{651D0EA0-7E1C-4898-B1CA-F30B4809AF5B}" type="datetimeFigureOut">
               <a:rPr lang="en-SG" smtClean="0"/>
-              <a:t>14/8/2026</a:t>
+              <a:t>16/8/2026</a:t>
             </a:fld>
             <a:endParaRPr lang="en-SG"/>
           </a:p>
@@ -3787,10 +3787,10 @@
       </p:grpSpPr>
       <p:sp>
         <p:nvSpPr>
-          <p:cNvPr id="4" name="Rectangle: Rounded Corners 3">
-            <a:extLst>
-              <a:ext uri="{FF2B5EF4-FFF2-40B4-BE49-F238E27FC236}">
-                <a16:creationId xmlns:a16="http://schemas.microsoft.com/office/drawing/2014/main" id="{9E5197B4-4DE7-CC07-E13A-AEC4F709645F}"/>
+          <p:cNvPr id="66" name="Rectangle 65">
+            <a:extLst>
+              <a:ext uri="{FF2B5EF4-FFF2-40B4-BE49-F238E27FC236}">
+                <a16:creationId xmlns:a16="http://schemas.microsoft.com/office/drawing/2014/main" id="{837A8677-8040-C491-6D80-73149652E6CE}"/>
               </a:ext>
             </a:extLst>
           </p:cNvPr>
@@ -3799,18 +3799,18 @@
         </p:nvSpPr>
         <p:spPr>
           <a:xfrm>
-            <a:off x="1526177" y="4149635"/>
-            <a:ext cx="5516270" cy="757072"/>
-          </a:xfrm>
-          <a:prstGeom prst="roundRect">
+            <a:off x="4543840" y="2145434"/>
+            <a:ext cx="2489871" cy="2995813"/>
+          </a:xfrm>
+          <a:prstGeom prst="rect">
             <a:avLst/>
           </a:prstGeom>
           <a:solidFill>
-            <a:srgbClr val="38A36F"/>
+            <a:schemeClr val="accent6">
+              <a:lumMod val="20000"/>
+              <a:lumOff val="80000"/>
+            </a:schemeClr>
           </a:solidFill>
-          <a:ln>
-            <a:noFill/>
-          </a:ln>
         </p:spPr>
         <p:style>
           <a:lnRef idx="2">
@@ -3839,10 +3839,62 @@
       </p:sp>
       <p:sp>
         <p:nvSpPr>
-          <p:cNvPr id="5" name="TextBox 4">
-            <a:extLst>
-              <a:ext uri="{FF2B5EF4-FFF2-40B4-BE49-F238E27FC236}">
-                <a16:creationId xmlns:a16="http://schemas.microsoft.com/office/drawing/2014/main" id="{B5C1FDBE-BA81-08CE-4269-CFD5B8380253}"/>
+          <p:cNvPr id="4" name="Rectangle 3">
+            <a:extLst>
+              <a:ext uri="{FF2B5EF4-FFF2-40B4-BE49-F238E27FC236}">
+                <a16:creationId xmlns:a16="http://schemas.microsoft.com/office/drawing/2014/main" id="{ED7DD3D4-6B5E-7CB5-E003-2C037546352E}"/>
+              </a:ext>
+            </a:extLst>
+          </p:cNvPr>
+          <p:cNvSpPr/>
+          <p:nvPr/>
+        </p:nvSpPr>
+        <p:spPr>
+          <a:xfrm>
+            <a:off x="548582" y="2144789"/>
+            <a:ext cx="3413179" cy="4239664"/>
+          </a:xfrm>
+          <a:prstGeom prst="rect">
+            <a:avLst/>
+          </a:prstGeom>
+          <a:solidFill>
+            <a:schemeClr val="accent1">
+              <a:lumMod val="20000"/>
+              <a:lumOff val="80000"/>
+            </a:schemeClr>
+          </a:solidFill>
+        </p:spPr>
+        <p:style>
+          <a:lnRef idx="2">
+            <a:schemeClr val="accent1">
+              <a:shade val="15000"/>
+            </a:schemeClr>
+          </a:lnRef>
+          <a:fillRef idx="1">
+            <a:schemeClr val="accent1"/>
+          </a:fillRef>
+          <a:effectRef idx="0">
+            <a:schemeClr val="accent1"/>
+          </a:effectRef>
+          <a:fontRef idx="minor">
+            <a:schemeClr val="lt1"/>
+          </a:fontRef>
+        </p:style>
+        <p:txBody>
+          <a:bodyPr rtlCol="0" anchor="ctr"/>
+          <a:lstStyle/>
+          <a:p>
+            <a:pPr algn="ctr"/>
+            <a:endParaRPr lang="en-SG" dirty="0"/>
+          </a:p>
+        </p:txBody>
+      </p:sp>
+      <p:sp>
+        <p:nvSpPr>
+          <p:cNvPr id="68" name="TextBox 67">
+            <a:extLst>
+              <a:ext uri="{FF2B5EF4-FFF2-40B4-BE49-F238E27FC236}">
+                <a16:creationId xmlns:a16="http://schemas.microsoft.com/office/drawing/2014/main" id="{785B9271-91E4-96A0-FFD7-67E7E3B97AB1}"/>
               </a:ext>
             </a:extLst>
           </p:cNvPr>
@@ -3851,8 +3903,8 @@
         </p:nvSpPr>
         <p:spPr>
           <a:xfrm>
-            <a:off x="1637951" y="4180054"/>
-            <a:ext cx="1320679" cy="646331"/>
+            <a:off x="4479495" y="1786827"/>
+            <a:ext cx="2884604" cy="307777"/>
           </a:xfrm>
           <a:prstGeom prst="rect">
             <a:avLst/>
@@ -3866,47 +3918,19 @@
           <a:lstStyle/>
           <a:p>
             <a:r>
-              <a:rPr lang="en-US" sz="1200" b="1" dirty="0">
-                <a:solidFill>
-                  <a:schemeClr val="bg1"/>
-                </a:solidFill>
-              </a:rPr>
-              <a:t>Level 0</a:t>
-            </a:r>
-          </a:p>
-          <a:p>
-            <a:r>
-              <a:rPr lang="en-US" sz="1200" dirty="0">
-                <a:solidFill>
-                  <a:schemeClr val="bg1"/>
-                </a:solidFill>
-              </a:rPr>
-              <a:t>Physical Process</a:t>
-            </a:r>
-          </a:p>
-          <a:p>
-            <a:r>
-              <a:rPr lang="en-US" sz="1200" dirty="0">
-                <a:solidFill>
-                  <a:schemeClr val="bg1"/>
-                </a:solidFill>
-              </a:rPr>
-              <a:t>Field I/O device </a:t>
-            </a:r>
-            <a:endParaRPr lang="en-SG" sz="1200" dirty="0">
-              <a:solidFill>
-                <a:schemeClr val="bg1"/>
-              </a:solidFill>
-            </a:endParaRPr>
-          </a:p>
-        </p:txBody>
-      </p:sp>
-      <p:sp>
-        <p:nvSpPr>
-          <p:cNvPr id="8" name="Rectangle 7">
-            <a:extLst>
-              <a:ext uri="{FF2B5EF4-FFF2-40B4-BE49-F238E27FC236}">
-                <a16:creationId xmlns:a16="http://schemas.microsoft.com/office/drawing/2014/main" id="{383AF4DF-B366-1099-D346-83455AA304CE}"/>
+              <a:rPr lang="en-US" sz="1400" b="1" dirty="0"/>
+              <a:t>Level1 OT Controller Devices </a:t>
+            </a:r>
+            <a:endParaRPr lang="en-SG" sz="1400" b="1" dirty="0"/>
+          </a:p>
+        </p:txBody>
+      </p:sp>
+      <p:sp>
+        <p:nvSpPr>
+          <p:cNvPr id="80" name="Rectangle 79">
+            <a:extLst>
+              <a:ext uri="{FF2B5EF4-FFF2-40B4-BE49-F238E27FC236}">
+                <a16:creationId xmlns:a16="http://schemas.microsoft.com/office/drawing/2014/main" id="{410193F1-FCF7-0996-4AFD-5FEB7922A1DC}"/>
               </a:ext>
             </a:extLst>
           </p:cNvPr>
@@ -3915,17 +3939,22 @@
         </p:nvSpPr>
         <p:spPr>
           <a:xfrm>
-            <a:off x="3200556" y="4352922"/>
-            <a:ext cx="472819" cy="356391"/>
+            <a:off x="5219105" y="3018211"/>
+            <a:ext cx="1494965" cy="295727"/>
           </a:xfrm>
           <a:prstGeom prst="rect">
             <a:avLst/>
           </a:prstGeom>
           <a:solidFill>
-            <a:schemeClr val="bg1">
+            <a:schemeClr val="accent6">
               <a:lumMod val="75000"/>
             </a:schemeClr>
           </a:solidFill>
+          <a:ln>
+            <a:solidFill>
+              <a:schemeClr val="tx1"/>
+            </a:solidFill>
+          </a:ln>
         </p:spPr>
         <p:style>
           <a:lnRef idx="2">
@@ -3947,23 +3976,186 @@
           <a:bodyPr rtlCol="0" anchor="ctr"/>
           <a:lstStyle/>
           <a:p>
-            <a:r>
-              <a:rPr lang="en-SG" sz="1200" b="1" dirty="0">
-                <a:solidFill>
-                  <a:schemeClr val="tx1"/>
-                </a:solidFill>
-              </a:rPr>
-              <a:t>IED</a:t>
-            </a:r>
-          </a:p>
-        </p:txBody>
-      </p:sp>
-      <p:sp>
-        <p:nvSpPr>
-          <p:cNvPr id="9" name="Rectangle 8">
-            <a:extLst>
-              <a:ext uri="{FF2B5EF4-FFF2-40B4-BE49-F238E27FC236}">
-                <a16:creationId xmlns:a16="http://schemas.microsoft.com/office/drawing/2014/main" id="{C346A1D6-F15E-CAD7-5311-499BD4FAD07D}"/>
+            <a:pPr algn="ctr"/>
+            <a:r>
+              <a:rPr lang="en-US" sz="1050" b="1" dirty="0"/>
+              <a:t>Input Parameter </a:t>
+            </a:r>
+            <a:r>
+              <a:rPr lang="en-US" sz="1050" b="1" dirty="0" err="1"/>
+              <a:t>Dict</a:t>
+            </a:r>
+            <a:endParaRPr lang="en-SG" sz="1050" b="1" dirty="0"/>
+          </a:p>
+        </p:txBody>
+      </p:sp>
+      <p:pic>
+        <p:nvPicPr>
+          <p:cNvPr id="82" name="Picture 81">
+            <a:extLst>
+              <a:ext uri="{FF2B5EF4-FFF2-40B4-BE49-F238E27FC236}">
+                <a16:creationId xmlns:a16="http://schemas.microsoft.com/office/drawing/2014/main" id="{0C4944A4-AC6E-C358-AD9C-F8CDE9B6C9A5}"/>
+              </a:ext>
+            </a:extLst>
+          </p:cNvPr>
+          <p:cNvPicPr>
+            <a:picLocks noChangeAspect="1"/>
+          </p:cNvPicPr>
+          <p:nvPr/>
+        </p:nvPicPr>
+        <p:blipFill>
+          <a:blip r:embed="rId3"/>
+          <a:stretch>
+            <a:fillRect/>
+          </a:stretch>
+        </p:blipFill>
+        <p:spPr>
+          <a:xfrm>
+            <a:off x="5415143" y="3599698"/>
+            <a:ext cx="762864" cy="663898"/>
+          </a:xfrm>
+          <a:prstGeom prst="rect">
+            <a:avLst/>
+          </a:prstGeom>
+          <a:ln w="19050">
+            <a:solidFill>
+              <a:schemeClr val="tx1"/>
+            </a:solidFill>
+          </a:ln>
+        </p:spPr>
+      </p:pic>
+      <p:cxnSp>
+        <p:nvCxnSpPr>
+          <p:cNvPr id="84" name="Straight Arrow Connector 83">
+            <a:extLst>
+              <a:ext uri="{FF2B5EF4-FFF2-40B4-BE49-F238E27FC236}">
+                <a16:creationId xmlns:a16="http://schemas.microsoft.com/office/drawing/2014/main" id="{4D271E74-DEAC-DBC5-E155-98AC307DE59C}"/>
+              </a:ext>
+            </a:extLst>
+          </p:cNvPr>
+          <p:cNvCxnSpPr>
+            <a:cxnSpLocks/>
+          </p:cNvCxnSpPr>
+          <p:nvPr/>
+        </p:nvCxnSpPr>
+        <p:spPr>
+          <a:xfrm>
+            <a:off x="5796575" y="3305723"/>
+            <a:ext cx="0" cy="245081"/>
+          </a:xfrm>
+          <a:prstGeom prst="straightConnector1">
+            <a:avLst/>
+          </a:prstGeom>
+          <a:ln>
+            <a:prstDash val="sysDash"/>
+            <a:tailEnd type="triangle"/>
+          </a:ln>
+        </p:spPr>
+        <p:style>
+          <a:lnRef idx="2">
+            <a:schemeClr val="dk1"/>
+          </a:lnRef>
+          <a:fillRef idx="0">
+            <a:schemeClr val="dk1"/>
+          </a:fillRef>
+          <a:effectRef idx="1">
+            <a:schemeClr val="dk1"/>
+          </a:effectRef>
+          <a:fontRef idx="minor">
+            <a:schemeClr val="tx1"/>
+          </a:fontRef>
+        </p:style>
+      </p:cxnSp>
+      <p:sp>
+        <p:nvSpPr>
+          <p:cNvPr id="125" name="TextBox 124">
+            <a:extLst>
+              <a:ext uri="{FF2B5EF4-FFF2-40B4-BE49-F238E27FC236}">
+                <a16:creationId xmlns:a16="http://schemas.microsoft.com/office/drawing/2014/main" id="{587F13EF-BB40-8784-CA1E-3F7F9B4EDF0E}"/>
+              </a:ext>
+            </a:extLst>
+          </p:cNvPr>
+          <p:cNvSpPr txBox="1"/>
+          <p:nvPr/>
+        </p:nvSpPr>
+        <p:spPr>
+          <a:xfrm>
+            <a:off x="527544" y="1766471"/>
+            <a:ext cx="3211175" cy="307777"/>
+          </a:xfrm>
+          <a:prstGeom prst="rect">
+            <a:avLst/>
+          </a:prstGeom>
+          <a:noFill/>
+        </p:spPr>
+        <p:txBody>
+          <a:bodyPr wrap="square" rtlCol="0">
+            <a:spAutoFit/>
+          </a:bodyPr>
+          <a:lstStyle/>
+          <a:p>
+            <a:r>
+              <a:rPr lang="en-US" sz="1400" b="1" dirty="0"/>
+              <a:t>Level0 OT Physical Field I/O Devices </a:t>
+            </a:r>
+            <a:endParaRPr lang="en-SG" sz="1400" b="1" dirty="0"/>
+          </a:p>
+        </p:txBody>
+      </p:sp>
+      <p:sp>
+        <p:nvSpPr>
+          <p:cNvPr id="148" name="TextBox 147">
+            <a:extLst>
+              <a:ext uri="{FF2B5EF4-FFF2-40B4-BE49-F238E27FC236}">
+                <a16:creationId xmlns:a16="http://schemas.microsoft.com/office/drawing/2014/main" id="{C0089D7C-7E8D-AD1C-D162-A3C3BE67C8FF}"/>
+              </a:ext>
+            </a:extLst>
+          </p:cNvPr>
+          <p:cNvSpPr txBox="1"/>
+          <p:nvPr/>
+        </p:nvSpPr>
+        <p:spPr>
+          <a:xfrm>
+            <a:off x="4733726" y="3578384"/>
+            <a:ext cx="875441" cy="646331"/>
+          </a:xfrm>
+          <a:prstGeom prst="rect">
+            <a:avLst/>
+          </a:prstGeom>
+          <a:noFill/>
+        </p:spPr>
+        <p:txBody>
+          <a:bodyPr wrap="square" rtlCol="0">
+            <a:spAutoFit/>
+          </a:bodyPr>
+          <a:lstStyle/>
+          <a:p>
+            <a:r>
+              <a:rPr lang="en-US" sz="1200" b="1" dirty="0"/>
+              <a:t>Auto</a:t>
+            </a:r>
+          </a:p>
+          <a:p>
+            <a:r>
+              <a:rPr lang="en-US" sz="1200" b="1" dirty="0"/>
+              <a:t>Control </a:t>
+            </a:r>
+          </a:p>
+          <a:p>
+            <a:r>
+              <a:rPr lang="en-US" sz="1200" b="1" dirty="0"/>
+              <a:t>Logic</a:t>
+            </a:r>
+            <a:endParaRPr lang="en-SG" sz="1200" b="1" dirty="0"/>
+          </a:p>
+        </p:txBody>
+      </p:sp>
+      <p:sp>
+        <p:nvSpPr>
+          <p:cNvPr id="161" name="Rectangle 160">
+            <a:extLst>
+              <a:ext uri="{FF2B5EF4-FFF2-40B4-BE49-F238E27FC236}">
+                <a16:creationId xmlns:a16="http://schemas.microsoft.com/office/drawing/2014/main" id="{32ADACBF-6CD1-7C6A-393E-8FDE39B7951F}"/>
               </a:ext>
             </a:extLst>
           </p:cNvPr>
@@ -3972,17 +4164,110 @@
         </p:nvSpPr>
         <p:spPr>
           <a:xfrm>
-            <a:off x="3895701" y="4352921"/>
-            <a:ext cx="1165150" cy="356391"/>
+            <a:off x="8011053" y="2144789"/>
+            <a:ext cx="3413180" cy="4219578"/>
           </a:xfrm>
           <a:prstGeom prst="rect">
             <a:avLst/>
           </a:prstGeom>
           <a:solidFill>
-            <a:schemeClr val="bg1">
+            <a:schemeClr val="accent2">
+              <a:lumMod val="20000"/>
+              <a:lumOff val="80000"/>
+            </a:schemeClr>
+          </a:solidFill>
+        </p:spPr>
+        <p:style>
+          <a:lnRef idx="2">
+            <a:schemeClr val="accent1">
+              <a:shade val="15000"/>
+            </a:schemeClr>
+          </a:lnRef>
+          <a:fillRef idx="1">
+            <a:schemeClr val="accent1"/>
+          </a:fillRef>
+          <a:effectRef idx="0">
+            <a:schemeClr val="accent1"/>
+          </a:effectRef>
+          <a:fontRef idx="minor">
+            <a:schemeClr val="lt1"/>
+          </a:fontRef>
+        </p:style>
+        <p:txBody>
+          <a:bodyPr rtlCol="0" anchor="ctr"/>
+          <a:lstStyle/>
+          <a:p>
+            <a:pPr algn="ctr"/>
+            <a:endParaRPr lang="en-SG" dirty="0"/>
+          </a:p>
+        </p:txBody>
+      </p:sp>
+      <p:sp>
+        <p:nvSpPr>
+          <p:cNvPr id="162" name="TextBox 161">
+            <a:extLst>
+              <a:ext uri="{FF2B5EF4-FFF2-40B4-BE49-F238E27FC236}">
+                <a16:creationId xmlns:a16="http://schemas.microsoft.com/office/drawing/2014/main" id="{5089A106-CF1F-EBEA-140F-03132C4ED2DD}"/>
+              </a:ext>
+            </a:extLst>
+          </p:cNvPr>
+          <p:cNvSpPr txBox="1"/>
+          <p:nvPr/>
+        </p:nvSpPr>
+        <p:spPr>
+          <a:xfrm>
+            <a:off x="7897351" y="1774329"/>
+            <a:ext cx="3211175" cy="307777"/>
+          </a:xfrm>
+          <a:prstGeom prst="rect">
+            <a:avLst/>
+          </a:prstGeom>
+          <a:noFill/>
+        </p:spPr>
+        <p:txBody>
+          <a:bodyPr wrap="square" rtlCol="0">
+            <a:spAutoFit/>
+          </a:bodyPr>
+          <a:lstStyle/>
+          <a:p>
+            <a:r>
+              <a:rPr lang="en-US" sz="1400" b="1" dirty="0"/>
+              <a:t>Level2 OT Control Console or HMI</a:t>
+            </a:r>
+            <a:endParaRPr lang="en-SG" sz="1400" b="1" dirty="0"/>
+          </a:p>
+        </p:txBody>
+      </p:sp>
+      <p:sp>
+        <p:nvSpPr>
+          <p:cNvPr id="83" name="Rectangle 82">
+            <a:extLst>
+              <a:ext uri="{FF2B5EF4-FFF2-40B4-BE49-F238E27FC236}">
+                <a16:creationId xmlns:a16="http://schemas.microsoft.com/office/drawing/2014/main" id="{A2733834-1F35-5EC2-2694-CCCF1592DCF7}"/>
+              </a:ext>
+            </a:extLst>
+          </p:cNvPr>
+          <p:cNvSpPr/>
+          <p:nvPr/>
+        </p:nvSpPr>
+        <p:spPr>
+          <a:xfrm>
+            <a:off x="5247599" y="4582055"/>
+            <a:ext cx="1573581" cy="295727"/>
+          </a:xfrm>
+          <a:prstGeom prst="rect">
+            <a:avLst/>
+          </a:prstGeom>
+          <a:solidFill>
+            <a:schemeClr val="accent6">
               <a:lumMod val="75000"/>
             </a:schemeClr>
           </a:solidFill>
+          <a:ln>
+            <a:solidFill>
+              <a:schemeClr val="tx1"/>
+            </a:solidFill>
+          </a:ln>
         </p:spPr>
         <p:style>
           <a:lnRef idx="2">
@@ -4004,23 +4289,25 @@
           <a:bodyPr rtlCol="0" anchor="ctr"/>
           <a:lstStyle/>
           <a:p>
-            <a:r>
-              <a:rPr lang="en-SG" sz="1200" b="1" dirty="0">
-                <a:solidFill>
-                  <a:schemeClr val="tx1"/>
-                </a:solidFill>
-              </a:rPr>
-              <a:t>Metering Unit </a:t>
-            </a:r>
-          </a:p>
-        </p:txBody>
-      </p:sp>
-      <p:sp>
-        <p:nvSpPr>
-          <p:cNvPr id="10" name="Rectangle 9">
-            <a:extLst>
-              <a:ext uri="{FF2B5EF4-FFF2-40B4-BE49-F238E27FC236}">
-                <a16:creationId xmlns:a16="http://schemas.microsoft.com/office/drawing/2014/main" id="{1BE1A17A-1EB1-84E0-8F84-52FC2A4D0880}"/>
+            <a:pPr algn="ctr"/>
+            <a:r>
+              <a:rPr lang="en-US" sz="1050" b="1" dirty="0"/>
+              <a:t>Output Parameter </a:t>
+            </a:r>
+            <a:r>
+              <a:rPr lang="en-US" sz="1050" b="1" dirty="0" err="1"/>
+              <a:t>Dict</a:t>
+            </a:r>
+            <a:endParaRPr lang="en-SG" sz="1050" b="1" dirty="0"/>
+          </a:p>
+        </p:txBody>
+      </p:sp>
+      <p:sp>
+        <p:nvSpPr>
+          <p:cNvPr id="32" name="Rectangle 31">
+            <a:extLst>
+              <a:ext uri="{FF2B5EF4-FFF2-40B4-BE49-F238E27FC236}">
+                <a16:creationId xmlns:a16="http://schemas.microsoft.com/office/drawing/2014/main" id="{7813263F-1648-5749-94E7-C1F6266E379E}"/>
               </a:ext>
             </a:extLst>
           </p:cNvPr>
@@ -4029,16 +4316,14 @@
         </p:nvSpPr>
         <p:spPr>
           <a:xfrm>
-            <a:off x="5217218" y="4340415"/>
-            <a:ext cx="790296" cy="356391"/>
+            <a:off x="3732213" y="2953594"/>
+            <a:ext cx="1183100" cy="559160"/>
           </a:xfrm>
           <a:prstGeom prst="rect">
             <a:avLst/>
           </a:prstGeom>
           <a:solidFill>
-            <a:schemeClr val="bg1">
-              <a:lumMod val="75000"/>
-            </a:schemeClr>
+            <a:schemeClr val="accent2"/>
           </a:solidFill>
         </p:spPr>
         <p:style>
@@ -4062,22 +4347,19 @@
           <a:lstStyle/>
           <a:p>
             <a:r>
-              <a:rPr lang="en-SG" sz="1200" b="1" dirty="0">
-                <a:solidFill>
-                  <a:schemeClr val="tx1"/>
-                </a:solidFill>
-              </a:rPr>
-              <a:t>Sensors</a:t>
-            </a:r>
-          </a:p>
-        </p:txBody>
-      </p:sp>
-      <p:sp>
-        <p:nvSpPr>
-          <p:cNvPr id="12" name="Rectangle: Rounded Corners 11">
-            <a:extLst>
-              <a:ext uri="{FF2B5EF4-FFF2-40B4-BE49-F238E27FC236}">
-                <a16:creationId xmlns:a16="http://schemas.microsoft.com/office/drawing/2014/main" id="{016A09C6-A80A-1773-2A4E-62EEE664A80B}"/>
+              <a:rPr lang="en-US" sz="1050" b="1" dirty="0"/>
+              <a:t>UDP Simulated  Electrical Signal RTU Input</a:t>
+            </a:r>
+            <a:endParaRPr lang="en-SG" sz="1050" b="1" dirty="0"/>
+          </a:p>
+        </p:txBody>
+      </p:sp>
+      <p:sp>
+        <p:nvSpPr>
+          <p:cNvPr id="35" name="Rectangle 34">
+            <a:extLst>
+              <a:ext uri="{FF2B5EF4-FFF2-40B4-BE49-F238E27FC236}">
+                <a16:creationId xmlns:a16="http://schemas.microsoft.com/office/drawing/2014/main" id="{6CE8F210-3F43-6E6B-8F0E-548004A1C5B5}"/>
               </a:ext>
             </a:extLst>
           </p:cNvPr>
@@ -4086,18 +4368,511 @@
         </p:nvSpPr>
         <p:spPr>
           <a:xfrm>
-            <a:off x="1526177" y="3190874"/>
-            <a:ext cx="5516270" cy="808039"/>
-          </a:xfrm>
-          <a:prstGeom prst="roundRect">
+            <a:off x="3710639" y="4351785"/>
+            <a:ext cx="1183100" cy="559160"/>
+          </a:xfrm>
+          <a:prstGeom prst="rect">
             <a:avLst/>
           </a:prstGeom>
           <a:solidFill>
-            <a:srgbClr val="F4C54F"/>
+            <a:schemeClr val="accent2"/>
           </a:solidFill>
+        </p:spPr>
+        <p:style>
+          <a:lnRef idx="2">
+            <a:schemeClr val="accent1">
+              <a:shade val="50000"/>
+            </a:schemeClr>
+          </a:lnRef>
+          <a:fillRef idx="1">
+            <a:schemeClr val="accent1"/>
+          </a:fillRef>
+          <a:effectRef idx="0">
+            <a:schemeClr val="accent1"/>
+          </a:effectRef>
+          <a:fontRef idx="minor">
+            <a:schemeClr val="lt1"/>
+          </a:fontRef>
+        </p:style>
+        <p:txBody>
+          <a:bodyPr rtlCol="0" anchor="ctr"/>
+          <a:lstStyle/>
+          <a:p>
+            <a:r>
+              <a:rPr lang="en-US" sz="1050" b="1" dirty="0"/>
+              <a:t>UDP Simulated  Electrical Signal RTU Output</a:t>
+            </a:r>
+            <a:endParaRPr lang="en-SG" sz="1050" b="1" dirty="0"/>
+          </a:p>
+        </p:txBody>
+      </p:sp>
+      <p:cxnSp>
+        <p:nvCxnSpPr>
+          <p:cNvPr id="65" name="Straight Arrow Connector 64">
+            <a:extLst>
+              <a:ext uri="{FF2B5EF4-FFF2-40B4-BE49-F238E27FC236}">
+                <a16:creationId xmlns:a16="http://schemas.microsoft.com/office/drawing/2014/main" id="{D81C8210-C0E7-B3E4-859C-1F4918518F21}"/>
+              </a:ext>
+            </a:extLst>
+          </p:cNvPr>
+          <p:cNvCxnSpPr>
+            <a:cxnSpLocks/>
+          </p:cNvCxnSpPr>
+          <p:nvPr/>
+        </p:nvCxnSpPr>
+        <p:spPr>
+          <a:xfrm>
+            <a:off x="5780178" y="4252750"/>
+            <a:ext cx="0" cy="329305"/>
+          </a:xfrm>
+          <a:prstGeom prst="straightConnector1">
+            <a:avLst/>
+          </a:prstGeom>
           <a:ln>
-            <a:noFill/>
+            <a:prstDash val="sysDash"/>
+            <a:tailEnd type="triangle"/>
           </a:ln>
+        </p:spPr>
+        <p:style>
+          <a:lnRef idx="2">
+            <a:schemeClr val="dk1"/>
+          </a:lnRef>
+          <a:fillRef idx="0">
+            <a:schemeClr val="dk1"/>
+          </a:fillRef>
+          <a:effectRef idx="1">
+            <a:schemeClr val="dk1"/>
+          </a:effectRef>
+          <a:fontRef idx="minor">
+            <a:schemeClr val="tx1"/>
+          </a:fontRef>
+        </p:style>
+      </p:cxnSp>
+      <p:cxnSp>
+        <p:nvCxnSpPr>
+          <p:cNvPr id="72" name="Straight Arrow Connector 71">
+            <a:extLst>
+              <a:ext uri="{FF2B5EF4-FFF2-40B4-BE49-F238E27FC236}">
+                <a16:creationId xmlns:a16="http://schemas.microsoft.com/office/drawing/2014/main" id="{58B4CEA2-012D-1E0A-676D-15BF8BE1A4D0}"/>
+              </a:ext>
+            </a:extLst>
+          </p:cNvPr>
+          <p:cNvCxnSpPr>
+            <a:cxnSpLocks/>
+            <a:endCxn id="80" idx="1"/>
+          </p:cNvCxnSpPr>
+          <p:nvPr/>
+        </p:nvCxnSpPr>
+        <p:spPr>
+          <a:xfrm>
+            <a:off x="4915313" y="3154680"/>
+            <a:ext cx="303792" cy="0"/>
+          </a:xfrm>
+          <a:prstGeom prst="straightConnector1">
+            <a:avLst/>
+          </a:prstGeom>
+          <a:ln>
+            <a:prstDash val="sysDash"/>
+            <a:tailEnd type="triangle"/>
+          </a:ln>
+        </p:spPr>
+        <p:style>
+          <a:lnRef idx="2">
+            <a:schemeClr val="dk1"/>
+          </a:lnRef>
+          <a:fillRef idx="0">
+            <a:schemeClr val="dk1"/>
+          </a:fillRef>
+          <a:effectRef idx="1">
+            <a:schemeClr val="dk1"/>
+          </a:effectRef>
+          <a:fontRef idx="minor">
+            <a:schemeClr val="tx1"/>
+          </a:fontRef>
+        </p:style>
+      </p:cxnSp>
+      <p:cxnSp>
+        <p:nvCxnSpPr>
+          <p:cNvPr id="75" name="Straight Arrow Connector 74">
+            <a:extLst>
+              <a:ext uri="{FF2B5EF4-FFF2-40B4-BE49-F238E27FC236}">
+                <a16:creationId xmlns:a16="http://schemas.microsoft.com/office/drawing/2014/main" id="{6D4977DE-76D9-A860-79E2-C07C7F2576C6}"/>
+              </a:ext>
+            </a:extLst>
+          </p:cNvPr>
+          <p:cNvCxnSpPr>
+            <a:cxnSpLocks/>
+          </p:cNvCxnSpPr>
+          <p:nvPr/>
+        </p:nvCxnSpPr>
+        <p:spPr>
+          <a:xfrm flipH="1" flipV="1">
+            <a:off x="4872774" y="4708550"/>
+            <a:ext cx="353860" cy="0"/>
+          </a:xfrm>
+          <a:prstGeom prst="straightConnector1">
+            <a:avLst/>
+          </a:prstGeom>
+          <a:ln>
+            <a:prstDash val="sysDash"/>
+            <a:tailEnd type="triangle"/>
+          </a:ln>
+        </p:spPr>
+        <p:style>
+          <a:lnRef idx="2">
+            <a:schemeClr val="dk1"/>
+          </a:lnRef>
+          <a:fillRef idx="0">
+            <a:schemeClr val="dk1"/>
+          </a:fillRef>
+          <a:effectRef idx="1">
+            <a:schemeClr val="dk1"/>
+          </a:effectRef>
+          <a:fontRef idx="minor">
+            <a:schemeClr val="tx1"/>
+          </a:fontRef>
+        </p:style>
+      </p:cxnSp>
+      <p:sp>
+        <p:nvSpPr>
+          <p:cNvPr id="81" name="Rectangle 80">
+            <a:extLst>
+              <a:ext uri="{FF2B5EF4-FFF2-40B4-BE49-F238E27FC236}">
+                <a16:creationId xmlns:a16="http://schemas.microsoft.com/office/drawing/2014/main" id="{AEA0A740-926A-31A2-62D0-5B65F5211AC2}"/>
+              </a:ext>
+            </a:extLst>
+          </p:cNvPr>
+          <p:cNvSpPr/>
+          <p:nvPr/>
+        </p:nvSpPr>
+        <p:spPr>
+          <a:xfrm>
+            <a:off x="6509352" y="3581371"/>
+            <a:ext cx="965256" cy="340962"/>
+          </a:xfrm>
+          <a:prstGeom prst="rect">
+            <a:avLst/>
+          </a:prstGeom>
+          <a:solidFill>
+            <a:schemeClr val="accent2"/>
+          </a:solidFill>
+        </p:spPr>
+        <p:style>
+          <a:lnRef idx="2">
+            <a:schemeClr val="accent1">
+              <a:shade val="50000"/>
+            </a:schemeClr>
+          </a:lnRef>
+          <a:fillRef idx="1">
+            <a:schemeClr val="accent1"/>
+          </a:fillRef>
+          <a:effectRef idx="0">
+            <a:schemeClr val="accent1"/>
+          </a:effectRef>
+          <a:fontRef idx="minor">
+            <a:schemeClr val="lt1"/>
+          </a:fontRef>
+        </p:style>
+        <p:txBody>
+          <a:bodyPr rtlCol="0" anchor="ctr"/>
+          <a:lstStyle/>
+          <a:p>
+            <a:r>
+              <a:rPr lang="en-US" sz="1050" b="1" dirty="0"/>
+              <a:t>D</a:t>
+            </a:r>
+            <a:r>
+              <a:rPr lang="en-SG" sz="1050" b="1" dirty="0"/>
+              <a:t>NP3 Server</a:t>
+            </a:r>
+          </a:p>
+        </p:txBody>
+      </p:sp>
+      <p:cxnSp>
+        <p:nvCxnSpPr>
+          <p:cNvPr id="87" name="Straight Connector 86">
+            <a:extLst>
+              <a:ext uri="{FF2B5EF4-FFF2-40B4-BE49-F238E27FC236}">
+                <a16:creationId xmlns:a16="http://schemas.microsoft.com/office/drawing/2014/main" id="{525058C5-A339-2CFC-1C58-5CE6271AD8F4}"/>
+              </a:ext>
+            </a:extLst>
+          </p:cNvPr>
+          <p:cNvCxnSpPr>
+            <a:cxnSpLocks/>
+          </p:cNvCxnSpPr>
+          <p:nvPr/>
+        </p:nvCxnSpPr>
+        <p:spPr>
+          <a:xfrm>
+            <a:off x="6566585" y="3319702"/>
+            <a:ext cx="0" cy="258682"/>
+          </a:xfrm>
+          <a:prstGeom prst="line">
+            <a:avLst/>
+          </a:prstGeom>
+        </p:spPr>
+        <p:style>
+          <a:lnRef idx="2">
+            <a:schemeClr val="dk1"/>
+          </a:lnRef>
+          <a:fillRef idx="0">
+            <a:schemeClr val="dk1"/>
+          </a:fillRef>
+          <a:effectRef idx="1">
+            <a:schemeClr val="dk1"/>
+          </a:effectRef>
+          <a:fontRef idx="minor">
+            <a:schemeClr val="tx1"/>
+          </a:fontRef>
+        </p:style>
+      </p:cxnSp>
+      <p:sp>
+        <p:nvSpPr>
+          <p:cNvPr id="120" name="Rectangle 119">
+            <a:extLst>
+              <a:ext uri="{FF2B5EF4-FFF2-40B4-BE49-F238E27FC236}">
+                <a16:creationId xmlns:a16="http://schemas.microsoft.com/office/drawing/2014/main" id="{F00080B1-57FE-3EF4-943B-EFB50200C31E}"/>
+              </a:ext>
+            </a:extLst>
+          </p:cNvPr>
+          <p:cNvSpPr/>
+          <p:nvPr/>
+        </p:nvSpPr>
+        <p:spPr>
+          <a:xfrm>
+            <a:off x="6524779" y="4057946"/>
+            <a:ext cx="965256" cy="340962"/>
+          </a:xfrm>
+          <a:prstGeom prst="rect">
+            <a:avLst/>
+          </a:prstGeom>
+          <a:solidFill>
+            <a:schemeClr val="accent2"/>
+          </a:solidFill>
+        </p:spPr>
+        <p:style>
+          <a:lnRef idx="2">
+            <a:schemeClr val="accent1">
+              <a:shade val="50000"/>
+            </a:schemeClr>
+          </a:lnRef>
+          <a:fillRef idx="1">
+            <a:schemeClr val="accent1"/>
+          </a:fillRef>
+          <a:effectRef idx="0">
+            <a:schemeClr val="accent1"/>
+          </a:effectRef>
+          <a:fontRef idx="minor">
+            <a:schemeClr val="lt1"/>
+          </a:fontRef>
+        </p:style>
+        <p:txBody>
+          <a:bodyPr rtlCol="0" anchor="ctr"/>
+          <a:lstStyle/>
+          <a:p>
+            <a:r>
+              <a:rPr lang="en-SG" sz="1050" b="1" dirty="0"/>
+              <a:t>NDP3 Client</a:t>
+            </a:r>
+          </a:p>
+        </p:txBody>
+      </p:sp>
+      <p:pic>
+        <p:nvPicPr>
+          <p:cNvPr id="7" name="Picture 6">
+            <a:extLst>
+              <a:ext uri="{FF2B5EF4-FFF2-40B4-BE49-F238E27FC236}">
+                <a16:creationId xmlns:a16="http://schemas.microsoft.com/office/drawing/2014/main" id="{801BD5C1-01FF-CA5A-DCA7-43CAEE762324}"/>
+              </a:ext>
+            </a:extLst>
+          </p:cNvPr>
+          <p:cNvPicPr>
+            <a:picLocks noChangeAspect="1"/>
+          </p:cNvPicPr>
+          <p:nvPr/>
+        </p:nvPicPr>
+        <p:blipFill>
+          <a:blip r:embed="rId4">
+            <a:extLst>
+              <a:ext uri="{28A0092B-C50C-407E-A947-70E740481C1C}">
+                <a14:useLocalDpi xmlns:a14="http://schemas.microsoft.com/office/drawing/2010/main" val="0"/>
+              </a:ext>
+            </a:extLst>
+          </a:blip>
+          <a:srcRect/>
+          <a:stretch>
+            <a:fillRect/>
+          </a:stretch>
+        </p:blipFill>
+        <p:spPr bwMode="auto">
+          <a:xfrm>
+            <a:off x="627240" y="2511144"/>
+            <a:ext cx="3015909" cy="1841400"/>
+          </a:xfrm>
+          <a:prstGeom prst="rect">
+            <a:avLst/>
+          </a:prstGeom>
+          <a:noFill/>
+          <a:ln w="19050">
+            <a:solidFill>
+              <a:schemeClr val="tx1"/>
+            </a:solidFill>
+          </a:ln>
+        </p:spPr>
+      </p:pic>
+      <p:pic>
+        <p:nvPicPr>
+          <p:cNvPr id="8" name="Picture 7">
+            <a:extLst>
+              <a:ext uri="{FF2B5EF4-FFF2-40B4-BE49-F238E27FC236}">
+                <a16:creationId xmlns:a16="http://schemas.microsoft.com/office/drawing/2014/main" id="{6477CF6C-F68F-DA56-04A7-492B6FEE3002}"/>
+              </a:ext>
+            </a:extLst>
+          </p:cNvPr>
+          <p:cNvPicPr>
+            <a:picLocks noChangeAspect="1"/>
+          </p:cNvPicPr>
+          <p:nvPr/>
+        </p:nvPicPr>
+        <p:blipFill>
+          <a:blip r:embed="rId5">
+            <a:extLst>
+              <a:ext uri="{28A0092B-C50C-407E-A947-70E740481C1C}">
+                <a14:useLocalDpi xmlns:a14="http://schemas.microsoft.com/office/drawing/2010/main" val="0"/>
+              </a:ext>
+            </a:extLst>
+          </a:blip>
+          <a:srcRect/>
+          <a:stretch>
+            <a:fillRect/>
+          </a:stretch>
+        </p:blipFill>
+        <p:spPr bwMode="auto">
+          <a:xfrm>
+            <a:off x="649266" y="4673267"/>
+            <a:ext cx="2982263" cy="1526799"/>
+          </a:xfrm>
+          <a:prstGeom prst="rect">
+            <a:avLst/>
+          </a:prstGeom>
+          <a:noFill/>
+          <a:ln w="19050">
+            <a:solidFill>
+              <a:schemeClr val="tx1"/>
+            </a:solidFill>
+          </a:ln>
+        </p:spPr>
+      </p:pic>
+      <p:sp>
+        <p:nvSpPr>
+          <p:cNvPr id="12" name="TextBox 11">
+            <a:extLst>
+              <a:ext uri="{FF2B5EF4-FFF2-40B4-BE49-F238E27FC236}">
+                <a16:creationId xmlns:a16="http://schemas.microsoft.com/office/drawing/2014/main" id="{2DCBA473-2400-C830-B1E3-9399BB15C164}"/>
+              </a:ext>
+            </a:extLst>
+          </p:cNvPr>
+          <p:cNvSpPr txBox="1"/>
+          <p:nvPr/>
+        </p:nvSpPr>
+        <p:spPr>
+          <a:xfrm>
+            <a:off x="527544" y="2182278"/>
+            <a:ext cx="3470111" cy="307777"/>
+          </a:xfrm>
+          <a:prstGeom prst="rect">
+            <a:avLst/>
+          </a:prstGeom>
+          <a:noFill/>
+        </p:spPr>
+        <p:txBody>
+          <a:bodyPr wrap="square" rtlCol="0">
+            <a:spAutoFit/>
+          </a:bodyPr>
+          <a:lstStyle/>
+          <a:p>
+            <a:r>
+              <a:rPr lang="en-SG" sz="1400" b="1" dirty="0">
+                <a:solidFill>
+                  <a:schemeClr val="tx2">
+                    <a:lumMod val="75000"/>
+                    <a:lumOff val="25000"/>
+                  </a:schemeClr>
+                </a:solidFill>
+              </a:rPr>
+              <a:t>Gas Power Generator Simulator Program </a:t>
+            </a:r>
+          </a:p>
+        </p:txBody>
+      </p:sp>
+      <p:sp>
+        <p:nvSpPr>
+          <p:cNvPr id="14" name="TextBox 13">
+            <a:extLst>
+              <a:ext uri="{FF2B5EF4-FFF2-40B4-BE49-F238E27FC236}">
+                <a16:creationId xmlns:a16="http://schemas.microsoft.com/office/drawing/2014/main" id="{B3BB6035-ECDD-E5CD-8792-25E6CC3C57B6}"/>
+              </a:ext>
+            </a:extLst>
+          </p:cNvPr>
+          <p:cNvSpPr txBox="1"/>
+          <p:nvPr/>
+        </p:nvSpPr>
+        <p:spPr>
+          <a:xfrm>
+            <a:off x="601142" y="4384208"/>
+            <a:ext cx="3470111" cy="307777"/>
+          </a:xfrm>
+          <a:prstGeom prst="rect">
+            <a:avLst/>
+          </a:prstGeom>
+          <a:noFill/>
+        </p:spPr>
+        <p:txBody>
+          <a:bodyPr wrap="square" rtlCol="0">
+            <a:spAutoFit/>
+          </a:bodyPr>
+          <a:lstStyle/>
+          <a:p>
+            <a:r>
+              <a:rPr lang="en-SG" sz="1400" b="1" dirty="0">
+                <a:solidFill>
+                  <a:schemeClr val="tx2">
+                    <a:lumMod val="75000"/>
+                    <a:lumOff val="25000"/>
+                  </a:schemeClr>
+                </a:solidFill>
+              </a:rPr>
+              <a:t>Transformer Simulator Program </a:t>
+            </a:r>
+          </a:p>
+        </p:txBody>
+      </p:sp>
+      <p:sp>
+        <p:nvSpPr>
+          <p:cNvPr id="18" name="Rectangle 17">
+            <a:extLst>
+              <a:ext uri="{FF2B5EF4-FFF2-40B4-BE49-F238E27FC236}">
+                <a16:creationId xmlns:a16="http://schemas.microsoft.com/office/drawing/2014/main" id="{8257B2BA-AB22-7164-ABAC-4C8AEB7A5B04}"/>
+              </a:ext>
+            </a:extLst>
+          </p:cNvPr>
+          <p:cNvSpPr/>
+          <p:nvPr/>
+        </p:nvSpPr>
+        <p:spPr>
+          <a:xfrm>
+            <a:off x="4502109" y="5440114"/>
+            <a:ext cx="2489871" cy="924253"/>
+          </a:xfrm>
+          <a:prstGeom prst="rect">
+            <a:avLst/>
+          </a:prstGeom>
+          <a:solidFill>
+            <a:schemeClr val="accent6">
+              <a:lumMod val="20000"/>
+              <a:lumOff val="80000"/>
+            </a:schemeClr>
+          </a:solidFill>
         </p:spPr>
         <p:style>
           <a:lnRef idx="2">
@@ -4126,10 +4901,62 @@
       </p:sp>
       <p:sp>
         <p:nvSpPr>
-          <p:cNvPr id="13" name="TextBox 12">
-            <a:extLst>
-              <a:ext uri="{FF2B5EF4-FFF2-40B4-BE49-F238E27FC236}">
-                <a16:creationId xmlns:a16="http://schemas.microsoft.com/office/drawing/2014/main" id="{CC2317B8-6544-4A01-559C-4AF56B81F75F}"/>
+          <p:cNvPr id="22" name="Rectangle 21">
+            <a:extLst>
+              <a:ext uri="{FF2B5EF4-FFF2-40B4-BE49-F238E27FC236}">
+                <a16:creationId xmlns:a16="http://schemas.microsoft.com/office/drawing/2014/main" id="{BFED4AA2-6330-6FE4-282B-0FC75A6EF3D2}"/>
+              </a:ext>
+            </a:extLst>
+          </p:cNvPr>
+          <p:cNvSpPr/>
+          <p:nvPr/>
+        </p:nvSpPr>
+        <p:spPr>
+          <a:xfrm>
+            <a:off x="3710639" y="5734303"/>
+            <a:ext cx="1824158" cy="411596"/>
+          </a:xfrm>
+          <a:prstGeom prst="rect">
+            <a:avLst/>
+          </a:prstGeom>
+          <a:solidFill>
+            <a:schemeClr val="accent2"/>
+          </a:solidFill>
+        </p:spPr>
+        <p:style>
+          <a:lnRef idx="2">
+            <a:schemeClr val="accent1">
+              <a:shade val="50000"/>
+            </a:schemeClr>
+          </a:lnRef>
+          <a:fillRef idx="1">
+            <a:schemeClr val="accent1"/>
+          </a:fillRef>
+          <a:effectRef idx="0">
+            <a:schemeClr val="accent1"/>
+          </a:effectRef>
+          <a:fontRef idx="minor">
+            <a:schemeClr val="lt1"/>
+          </a:fontRef>
+        </p:style>
+        <p:txBody>
+          <a:bodyPr rtlCol="0" anchor="ctr"/>
+          <a:lstStyle/>
+          <a:p>
+            <a:r>
+              <a:rPr lang="en-US" sz="1050" b="1" dirty="0"/>
+              <a:t>UDP Simulated  Electrical Signal RTU Input</a:t>
+            </a:r>
+            <a:endParaRPr lang="en-SG" sz="1050" b="1" dirty="0"/>
+          </a:p>
+        </p:txBody>
+      </p:sp>
+      <p:sp>
+        <p:nvSpPr>
+          <p:cNvPr id="25" name="TextBox 24">
+            <a:extLst>
+              <a:ext uri="{FF2B5EF4-FFF2-40B4-BE49-F238E27FC236}">
+                <a16:creationId xmlns:a16="http://schemas.microsoft.com/office/drawing/2014/main" id="{B40E313C-6362-6892-CD05-00DB836BEE80}"/>
               </a:ext>
             </a:extLst>
           </p:cNvPr>
@@ -4138,8 +4965,8 @@
         </p:nvSpPr>
         <p:spPr>
           <a:xfrm>
-            <a:off x="1670217" y="3315125"/>
-            <a:ext cx="1139678" cy="430887"/>
+            <a:off x="4483101" y="5449249"/>
+            <a:ext cx="2252131" cy="307777"/>
           </a:xfrm>
           <a:prstGeom prst="rect">
             <a:avLst/>
@@ -4153,25 +4980,263 @@
           <a:lstStyle/>
           <a:p>
             <a:r>
-              <a:rPr lang="en-US" sz="1100" b="1" dirty="0"/>
-              <a:t>Level 1</a:t>
-            </a:r>
-          </a:p>
-          <a:p>
-            <a:r>
-              <a:rPr lang="en-US" sz="1100" dirty="0"/>
-              <a:t>Controller LAN </a:t>
-            </a:r>
-            <a:endParaRPr lang="en-SG" sz="1100" dirty="0"/>
+              <a:rPr lang="en-US" sz="1400" b="1" dirty="0">
+                <a:solidFill>
+                  <a:schemeClr val="accent6">
+                    <a:lumMod val="50000"/>
+                  </a:schemeClr>
+                </a:solidFill>
+              </a:rPr>
+              <a:t>Metering Unit Simulation</a:t>
+            </a:r>
+            <a:endParaRPr lang="en-SG" sz="1400" b="1" dirty="0">
+              <a:solidFill>
+                <a:schemeClr val="accent6">
+                  <a:lumMod val="50000"/>
+                </a:schemeClr>
+              </a:solidFill>
+            </a:endParaRPr>
+          </a:p>
+        </p:txBody>
+      </p:sp>
+      <p:cxnSp>
+        <p:nvCxnSpPr>
+          <p:cNvPr id="27" name="Connector: Elbow 26">
+            <a:extLst>
+              <a:ext uri="{FF2B5EF4-FFF2-40B4-BE49-F238E27FC236}">
+                <a16:creationId xmlns:a16="http://schemas.microsoft.com/office/drawing/2014/main" id="{67D04D19-6C05-98C0-6ED5-C4A17572279F}"/>
+              </a:ext>
+            </a:extLst>
+          </p:cNvPr>
+          <p:cNvCxnSpPr>
+            <a:stCxn id="120" idx="1"/>
+          </p:cNvCxnSpPr>
+          <p:nvPr/>
+        </p:nvCxnSpPr>
+        <p:spPr>
+          <a:xfrm rot="10800000">
+            <a:off x="6336793" y="3313939"/>
+            <a:ext cx="187987" cy="914489"/>
+          </a:xfrm>
+          <a:prstGeom prst="bentConnector2">
+            <a:avLst/>
+          </a:prstGeom>
+        </p:spPr>
+        <p:style>
+          <a:lnRef idx="2">
+            <a:schemeClr val="dk1"/>
+          </a:lnRef>
+          <a:fillRef idx="0">
+            <a:schemeClr val="dk1"/>
+          </a:fillRef>
+          <a:effectRef idx="1">
+            <a:schemeClr val="dk1"/>
+          </a:effectRef>
+          <a:fontRef idx="minor">
+            <a:schemeClr val="tx1"/>
+          </a:fontRef>
+        </p:style>
+      </p:cxnSp>
+      <p:sp>
+        <p:nvSpPr>
+          <p:cNvPr id="29" name="Rectangle 28">
+            <a:extLst>
+              <a:ext uri="{FF2B5EF4-FFF2-40B4-BE49-F238E27FC236}">
+                <a16:creationId xmlns:a16="http://schemas.microsoft.com/office/drawing/2014/main" id="{736023D7-EADF-B320-6F9A-9DE5E13289D5}"/>
+              </a:ext>
+            </a:extLst>
+          </p:cNvPr>
+          <p:cNvSpPr/>
+          <p:nvPr/>
+        </p:nvSpPr>
+        <p:spPr>
+          <a:xfrm>
+            <a:off x="6509352" y="5757026"/>
+            <a:ext cx="965256" cy="340962"/>
+          </a:xfrm>
+          <a:prstGeom prst="rect">
+            <a:avLst/>
+          </a:prstGeom>
+          <a:solidFill>
+            <a:schemeClr val="accent2"/>
+          </a:solidFill>
+        </p:spPr>
+        <p:style>
+          <a:lnRef idx="2">
+            <a:schemeClr val="accent1">
+              <a:shade val="50000"/>
+            </a:schemeClr>
+          </a:lnRef>
+          <a:fillRef idx="1">
+            <a:schemeClr val="accent1"/>
+          </a:fillRef>
+          <a:effectRef idx="0">
+            <a:schemeClr val="accent1"/>
+          </a:effectRef>
+          <a:fontRef idx="minor">
+            <a:schemeClr val="lt1"/>
+          </a:fontRef>
+        </p:style>
+        <p:txBody>
+          <a:bodyPr rtlCol="0" anchor="ctr"/>
+          <a:lstStyle/>
+          <a:p>
+            <a:r>
+              <a:rPr lang="en-US" sz="1050" b="1" dirty="0"/>
+              <a:t>D</a:t>
+            </a:r>
+            <a:r>
+              <a:rPr lang="en-SG" sz="1050" b="1" dirty="0"/>
+              <a:t>NP3 Server</a:t>
+            </a:r>
+          </a:p>
+        </p:txBody>
+      </p:sp>
+      <p:cxnSp>
+        <p:nvCxnSpPr>
+          <p:cNvPr id="34" name="Straight Arrow Connector 33">
+            <a:extLst>
+              <a:ext uri="{FF2B5EF4-FFF2-40B4-BE49-F238E27FC236}">
+                <a16:creationId xmlns:a16="http://schemas.microsoft.com/office/drawing/2014/main" id="{2D95B3EA-695C-8683-7F6F-B6370DB68676}"/>
+              </a:ext>
+            </a:extLst>
+          </p:cNvPr>
+          <p:cNvCxnSpPr>
+            <a:cxnSpLocks/>
+            <a:endCxn id="29" idx="1"/>
+          </p:cNvCxnSpPr>
+          <p:nvPr/>
+        </p:nvCxnSpPr>
+        <p:spPr>
+          <a:xfrm flipV="1">
+            <a:off x="5534797" y="5927507"/>
+            <a:ext cx="974555" cy="0"/>
+          </a:xfrm>
+          <a:prstGeom prst="straightConnector1">
+            <a:avLst/>
+          </a:prstGeom>
+          <a:ln>
+            <a:prstDash val="sysDash"/>
+            <a:tailEnd type="triangle"/>
+          </a:ln>
+        </p:spPr>
+        <p:style>
+          <a:lnRef idx="2">
+            <a:schemeClr val="dk1"/>
+          </a:lnRef>
+          <a:fillRef idx="0">
+            <a:schemeClr val="dk1"/>
+          </a:fillRef>
+          <a:effectRef idx="1">
+            <a:schemeClr val="dk1"/>
+          </a:effectRef>
+          <a:fontRef idx="minor">
+            <a:schemeClr val="tx1"/>
+          </a:fontRef>
+        </p:style>
+      </p:cxnSp>
+      <p:sp>
+        <p:nvSpPr>
+          <p:cNvPr id="51" name="TextBox 50">
+            <a:extLst>
+              <a:ext uri="{FF2B5EF4-FFF2-40B4-BE49-F238E27FC236}">
+                <a16:creationId xmlns:a16="http://schemas.microsoft.com/office/drawing/2014/main" id="{AA8E2B13-9828-258F-29C5-514FB36C81FD}"/>
+              </a:ext>
+            </a:extLst>
+          </p:cNvPr>
+          <p:cNvSpPr txBox="1"/>
+          <p:nvPr/>
+        </p:nvSpPr>
+        <p:spPr>
+          <a:xfrm>
+            <a:off x="4555358" y="2208149"/>
+            <a:ext cx="2732878" cy="523220"/>
+          </a:xfrm>
+          <a:prstGeom prst="rect">
+            <a:avLst/>
+          </a:prstGeom>
+          <a:noFill/>
+        </p:spPr>
+        <p:txBody>
+          <a:bodyPr wrap="square" rtlCol="0">
+            <a:spAutoFit/>
+          </a:bodyPr>
+          <a:lstStyle/>
+          <a:p>
+            <a:r>
+              <a:rPr lang="en-US" sz="1400" b="1" dirty="0">
+                <a:solidFill>
+                  <a:schemeClr val="accent6">
+                    <a:lumMod val="50000"/>
+                  </a:schemeClr>
+                </a:solidFill>
+              </a:rPr>
+              <a:t>Power Transmission Control RTU Simulation Framework</a:t>
+            </a:r>
+            <a:endParaRPr lang="en-SG" sz="1400" b="1" dirty="0">
+              <a:solidFill>
+                <a:schemeClr val="accent6">
+                  <a:lumMod val="50000"/>
+                </a:schemeClr>
+              </a:solidFill>
+            </a:endParaRPr>
+          </a:p>
+        </p:txBody>
+      </p:sp>
+      <p:sp>
+        <p:nvSpPr>
+          <p:cNvPr id="67" name="TextBox 66">
+            <a:extLst>
+              <a:ext uri="{FF2B5EF4-FFF2-40B4-BE49-F238E27FC236}">
+                <a16:creationId xmlns:a16="http://schemas.microsoft.com/office/drawing/2014/main" id="{E83D0994-FFC7-B371-BE19-4F804F4F3BC3}"/>
+              </a:ext>
+            </a:extLst>
+          </p:cNvPr>
+          <p:cNvSpPr txBox="1"/>
+          <p:nvPr/>
+        </p:nvSpPr>
+        <p:spPr>
+          <a:xfrm>
+            <a:off x="8046946" y="2198305"/>
+            <a:ext cx="2815913" cy="307777"/>
+          </a:xfrm>
+          <a:prstGeom prst="rect">
+            <a:avLst/>
+          </a:prstGeom>
+          <a:noFill/>
+        </p:spPr>
+        <p:txBody>
+          <a:bodyPr wrap="square" rtlCol="0">
+            <a:spAutoFit/>
+          </a:bodyPr>
+          <a:lstStyle/>
+          <a:p>
+            <a:r>
+              <a:rPr lang="en-US" sz="1400" b="1" dirty="0">
+                <a:solidFill>
+                  <a:schemeClr val="accent2">
+                    <a:lumMod val="50000"/>
+                  </a:schemeClr>
+                </a:solidFill>
+              </a:rPr>
+              <a:t>Generator Control And Monitor</a:t>
+            </a:r>
+            <a:endParaRPr lang="en-SG" sz="1400" b="1" dirty="0">
+              <a:solidFill>
+                <a:schemeClr val="accent2">
+                  <a:lumMod val="50000"/>
+                </a:schemeClr>
+              </a:solidFill>
+            </a:endParaRPr>
           </a:p>
         </p:txBody>
       </p:sp>
       <p:pic>
         <p:nvPicPr>
-          <p:cNvPr id="14" name="Picture 13">
-            <a:extLst>
-              <a:ext uri="{FF2B5EF4-FFF2-40B4-BE49-F238E27FC236}">
-                <a16:creationId xmlns:a16="http://schemas.microsoft.com/office/drawing/2014/main" id="{B086DE35-CD7A-4960-8049-92C03F0DC092}"/>
+          <p:cNvPr id="54" name="Picture 53">
+            <a:extLst>
+              <a:ext uri="{FF2B5EF4-FFF2-40B4-BE49-F238E27FC236}">
+                <a16:creationId xmlns:a16="http://schemas.microsoft.com/office/drawing/2014/main" id="{036153AB-458B-9850-0785-49A992BAFD68}"/>
               </a:ext>
             </a:extLst>
           </p:cNvPr>
@@ -4181,37 +5246,7 @@
           <p:nvPr/>
         </p:nvPicPr>
         <p:blipFill>
-          <a:blip r:embed="rId2"/>
-          <a:stretch>
-            <a:fillRect/>
-          </a:stretch>
-        </p:blipFill>
-        <p:spPr>
-          <a:xfrm>
-            <a:off x="4631210" y="3314455"/>
-            <a:ext cx="664712" cy="472684"/>
-          </a:xfrm>
-          <a:prstGeom prst="rect">
-            <a:avLst/>
-          </a:prstGeom>
-        </p:spPr>
-      </p:pic>
-      <p:pic>
-        <p:nvPicPr>
-          <p:cNvPr id="15" name="Picture 14" descr="TM221CE16R Schneider Electric Modicon M221 PLC CPU Mini USB Interface –  Ralakde Automation">
-            <a:extLst>
-              <a:ext uri="{FF2B5EF4-FFF2-40B4-BE49-F238E27FC236}">
-                <a16:creationId xmlns:a16="http://schemas.microsoft.com/office/drawing/2014/main" id="{053B07FA-9A1F-651A-5C38-9472179A08EB}"/>
-              </a:ext>
-            </a:extLst>
-          </p:cNvPr>
-          <p:cNvPicPr>
-            <a:picLocks noChangeAspect="1" noChangeArrowheads="1"/>
-          </p:cNvPicPr>
-          <p:nvPr/>
-        </p:nvPicPr>
-        <p:blipFill>
-          <a:blip r:embed="rId3">
+          <a:blip r:embed="rId6">
             <a:extLst>
               <a:ext uri="{28A0092B-C50C-407E-A947-70E740481C1C}">
                 <a14:useLocalDpi xmlns:a14="http://schemas.microsoft.com/office/drawing/2010/main" val="0"/>
@@ -4225,30 +5260,60 @@
         </p:blipFill>
         <p:spPr bwMode="auto">
           <a:xfrm>
-            <a:off x="3496654" y="3246330"/>
-            <a:ext cx="468371" cy="513473"/>
+            <a:off x="8159539" y="2582620"/>
+            <a:ext cx="3162389" cy="1324908"/>
           </a:xfrm>
           <a:prstGeom prst="rect">
             <a:avLst/>
           </a:prstGeom>
           <a:noFill/>
-          <a:extLst>
-            <a:ext uri="{909E8E84-426E-40DD-AFC4-6F175D3DCCD1}">
-              <a14:hiddenFill xmlns:a14="http://schemas.microsoft.com/office/drawing/2010/main">
-                <a:solidFill>
-                  <a:srgbClr val="FFFFFF"/>
-                </a:solidFill>
-              </a14:hiddenFill>
-            </a:ext>
-          </a:extLst>
+          <a:ln>
+            <a:noFill/>
+          </a:ln>
         </p:spPr>
       </p:pic>
-      <p:sp>
-        <p:nvSpPr>
-          <p:cNvPr id="16" name="TextBox 15">
-            <a:extLst>
-              <a:ext uri="{FF2B5EF4-FFF2-40B4-BE49-F238E27FC236}">
-                <a16:creationId xmlns:a16="http://schemas.microsoft.com/office/drawing/2014/main" id="{FBD8A088-E4BB-E724-5076-D08DB8E427E8}"/>
+      <p:pic>
+        <p:nvPicPr>
+          <p:cNvPr id="56" name="Picture 55">
+            <a:extLst>
+              <a:ext uri="{FF2B5EF4-FFF2-40B4-BE49-F238E27FC236}">
+                <a16:creationId xmlns:a16="http://schemas.microsoft.com/office/drawing/2014/main" id="{2B5051B4-EE9F-301E-398B-78D971AFA3F2}"/>
+              </a:ext>
+            </a:extLst>
+          </p:cNvPr>
+          <p:cNvPicPr>
+            <a:picLocks noChangeAspect="1"/>
+          </p:cNvPicPr>
+          <p:nvPr/>
+        </p:nvPicPr>
+        <p:blipFill>
+          <a:blip r:embed="rId7">
+            <a:extLst>
+              <a:ext uri="{28A0092B-C50C-407E-A947-70E740481C1C}">
+                <a14:useLocalDpi xmlns:a14="http://schemas.microsoft.com/office/drawing/2010/main" val="0"/>
+              </a:ext>
+            </a:extLst>
+          </a:blip>
+          <a:stretch>
+            <a:fillRect/>
+          </a:stretch>
+        </p:blipFill>
+        <p:spPr>
+          <a:xfrm>
+            <a:off x="8197424" y="4434689"/>
+            <a:ext cx="3130494" cy="1687451"/>
+          </a:xfrm>
+          <a:prstGeom prst="rect">
+            <a:avLst/>
+          </a:prstGeom>
+        </p:spPr>
+      </p:pic>
+      <p:sp>
+        <p:nvSpPr>
+          <p:cNvPr id="58" name="TextBox 57">
+            <a:extLst>
+              <a:ext uri="{FF2B5EF4-FFF2-40B4-BE49-F238E27FC236}">
+                <a16:creationId xmlns:a16="http://schemas.microsoft.com/office/drawing/2014/main" id="{725BC056-735A-713C-481A-B6C391D9162D}"/>
               </a:ext>
             </a:extLst>
           </p:cNvPr>
@@ -4257,8 +5322,8 @@
         </p:nvSpPr>
         <p:spPr>
           <a:xfrm>
-            <a:off x="3965025" y="3583558"/>
-            <a:ext cx="574446" cy="261610"/>
+            <a:off x="8169911" y="4078489"/>
+            <a:ext cx="2246229" cy="307777"/>
           </a:xfrm>
           <a:prstGeom prst="rect">
             <a:avLst/>
@@ -4272,74 +5337,150 @@
           <a:lstStyle/>
           <a:p>
             <a:r>
-              <a:rPr lang="en-US" sz="1100" b="1" dirty="0"/>
-              <a:t>PLC</a:t>
-            </a:r>
-            <a:endParaRPr lang="en-SG" sz="1100" b="1" dirty="0"/>
-          </a:p>
-        </p:txBody>
-      </p:sp>
-      <p:sp>
-        <p:nvSpPr>
-          <p:cNvPr id="17" name="TextBox 16">
-            <a:extLst>
-              <a:ext uri="{FF2B5EF4-FFF2-40B4-BE49-F238E27FC236}">
-                <a16:creationId xmlns:a16="http://schemas.microsoft.com/office/drawing/2014/main" id="{DC41D427-DF0E-AE86-58E1-98B06C6DAC66}"/>
-              </a:ext>
-            </a:extLst>
-          </p:cNvPr>
-          <p:cNvSpPr txBox="1"/>
+              <a:rPr lang="en-US" sz="1400" b="1" dirty="0">
+                <a:solidFill>
+                  <a:schemeClr val="accent2">
+                    <a:lumMod val="50000"/>
+                  </a:schemeClr>
+                </a:solidFill>
+              </a:rPr>
+              <a:t>Power Grid Monitor HMI</a:t>
+            </a:r>
+            <a:endParaRPr lang="en-SG" sz="1400" b="1" dirty="0">
+              <a:solidFill>
+                <a:schemeClr val="accent2">
+                  <a:lumMod val="50000"/>
+                </a:schemeClr>
+              </a:solidFill>
+            </a:endParaRPr>
+          </a:p>
+        </p:txBody>
+      </p:sp>
+      <p:sp>
+        <p:nvSpPr>
+          <p:cNvPr id="114" name="Rectangle 113">
+            <a:extLst>
+              <a:ext uri="{FF2B5EF4-FFF2-40B4-BE49-F238E27FC236}">
+                <a16:creationId xmlns:a16="http://schemas.microsoft.com/office/drawing/2014/main" id="{61ABEA43-1B13-4EFD-A074-E00CE4C34EC6}"/>
+              </a:ext>
+            </a:extLst>
+          </p:cNvPr>
+          <p:cNvSpPr/>
           <p:nvPr/>
         </p:nvSpPr>
         <p:spPr>
           <a:xfrm>
-            <a:off x="5572124" y="3550797"/>
-            <a:ext cx="559980" cy="261610"/>
+            <a:off x="7861407" y="3430221"/>
+            <a:ext cx="965256" cy="340962"/>
           </a:xfrm>
           <a:prstGeom prst="rect">
             <a:avLst/>
           </a:prstGeom>
-          <a:noFill/>
-        </p:spPr>
-        <p:txBody>
-          <a:bodyPr wrap="square" rtlCol="0">
-            <a:spAutoFit/>
-          </a:bodyPr>
-          <a:lstStyle/>
-          <a:p>
-            <a:r>
-              <a:rPr lang="en-SG" sz="1100" b="1" dirty="0"/>
-              <a:t>RTU</a:t>
+          <a:solidFill>
+            <a:schemeClr val="accent2"/>
+          </a:solidFill>
+        </p:spPr>
+        <p:style>
+          <a:lnRef idx="2">
+            <a:schemeClr val="accent1">
+              <a:shade val="50000"/>
+            </a:schemeClr>
+          </a:lnRef>
+          <a:fillRef idx="1">
+            <a:schemeClr val="accent1"/>
+          </a:fillRef>
+          <a:effectRef idx="0">
+            <a:schemeClr val="accent1"/>
+          </a:effectRef>
+          <a:fontRef idx="minor">
+            <a:schemeClr val="lt1"/>
+          </a:fontRef>
+        </p:style>
+        <p:txBody>
+          <a:bodyPr rtlCol="0" anchor="ctr"/>
+          <a:lstStyle/>
+          <a:p>
+            <a:r>
+              <a:rPr lang="en-SG" sz="1050" b="1" dirty="0"/>
+              <a:t>NDP3 Client</a:t>
+            </a:r>
+          </a:p>
+        </p:txBody>
+      </p:sp>
+      <p:sp>
+        <p:nvSpPr>
+          <p:cNvPr id="69" name="Rectangle 68">
+            <a:extLst>
+              <a:ext uri="{FF2B5EF4-FFF2-40B4-BE49-F238E27FC236}">
+                <a16:creationId xmlns:a16="http://schemas.microsoft.com/office/drawing/2014/main" id="{B2807C64-6BDD-E03B-B66B-D78BC0AFF245}"/>
+              </a:ext>
+            </a:extLst>
+          </p:cNvPr>
+          <p:cNvSpPr/>
+          <p:nvPr/>
+        </p:nvSpPr>
+        <p:spPr>
+          <a:xfrm>
+            <a:off x="7897351" y="5885904"/>
+            <a:ext cx="965256" cy="340962"/>
+          </a:xfrm>
+          <a:prstGeom prst="rect">
+            <a:avLst/>
+          </a:prstGeom>
+          <a:solidFill>
+            <a:schemeClr val="accent2"/>
+          </a:solidFill>
+        </p:spPr>
+        <p:style>
+          <a:lnRef idx="2">
+            <a:schemeClr val="accent1">
+              <a:shade val="50000"/>
+            </a:schemeClr>
+          </a:lnRef>
+          <a:fillRef idx="1">
+            <a:schemeClr val="accent1"/>
+          </a:fillRef>
+          <a:effectRef idx="0">
+            <a:schemeClr val="accent1"/>
+          </a:effectRef>
+          <a:fontRef idx="minor">
+            <a:schemeClr val="lt1"/>
+          </a:fontRef>
+        </p:style>
+        <p:txBody>
+          <a:bodyPr rtlCol="0" anchor="ctr"/>
+          <a:lstStyle/>
+          <a:p>
+            <a:r>
+              <a:rPr lang="en-SG" sz="1050" b="1" dirty="0"/>
+              <a:t>NDP3 Client</a:t>
             </a:r>
           </a:p>
         </p:txBody>
       </p:sp>
       <p:cxnSp>
         <p:nvCxnSpPr>
-          <p:cNvPr id="27" name="Connector: Elbow 26">
-            <a:extLst>
-              <a:ext uri="{FF2B5EF4-FFF2-40B4-BE49-F238E27FC236}">
-                <a16:creationId xmlns:a16="http://schemas.microsoft.com/office/drawing/2014/main" id="{4A2FCE97-444D-96B7-9D79-5FBBE78FB7FC}"/>
-              </a:ext>
-            </a:extLst>
-          </p:cNvPr>
-          <p:cNvCxnSpPr>
-            <a:cxnSpLocks/>
-            <a:stCxn id="14" idx="2"/>
-            <a:endCxn id="9" idx="0"/>
-          </p:cNvCxnSpPr>
+          <p:cNvPr id="71" name="Straight Arrow Connector 70">
+            <a:extLst>
+              <a:ext uri="{FF2B5EF4-FFF2-40B4-BE49-F238E27FC236}">
+                <a16:creationId xmlns:a16="http://schemas.microsoft.com/office/drawing/2014/main" id="{3B5D73E1-A9F8-4E93-9F38-AA246A882528}"/>
+              </a:ext>
+            </a:extLst>
+          </p:cNvPr>
+          <p:cNvCxnSpPr/>
           <p:nvPr/>
         </p:nvCxnSpPr>
         <p:spPr>
-          <a:xfrm rot="5400000">
-            <a:off x="4438030" y="3827385"/>
-            <a:ext cx="565782" cy="485290"/>
-          </a:xfrm>
-          <a:prstGeom prst="bentConnector3">
-            <a:avLst>
-              <a:gd name="adj1" fmla="val 50000"/>
-            </a:avLst>
+          <a:xfrm>
+            <a:off x="7288236" y="4398908"/>
+            <a:ext cx="0" cy="1335395"/>
+          </a:xfrm>
+          <a:prstGeom prst="straightConnector1">
+            <a:avLst/>
           </a:prstGeom>
+          <a:ln>
+            <a:tailEnd type="triangle"/>
+          </a:ln>
         </p:spPr>
         <p:style>
           <a:lnRef idx="2">
@@ -4358,30 +5499,30 @@
       </p:cxnSp>
       <p:cxnSp>
         <p:nvCxnSpPr>
-          <p:cNvPr id="30" name="Connector: Elbow 29">
-            <a:extLst>
-              <a:ext uri="{FF2B5EF4-FFF2-40B4-BE49-F238E27FC236}">
-                <a16:creationId xmlns:a16="http://schemas.microsoft.com/office/drawing/2014/main" id="{DABBCD2F-3340-3611-60D8-67FC7B402EA8}"/>
+          <p:cNvPr id="76" name="Connector: Elbow 75">
+            <a:extLst>
+              <a:ext uri="{FF2B5EF4-FFF2-40B4-BE49-F238E27FC236}">
+                <a16:creationId xmlns:a16="http://schemas.microsoft.com/office/drawing/2014/main" id="{7B5D3507-6E33-9968-2C7E-318FC59404B4}"/>
               </a:ext>
             </a:extLst>
           </p:cNvPr>
           <p:cNvCxnSpPr>
-            <a:cxnSpLocks/>
-            <a:stCxn id="14" idx="2"/>
-            <a:endCxn id="10" idx="0"/>
+            <a:stCxn id="69" idx="1"/>
+            <a:endCxn id="29" idx="3"/>
           </p:cNvCxnSpPr>
           <p:nvPr/>
         </p:nvCxnSpPr>
         <p:spPr>
-          <a:xfrm rot="16200000" flipH="1">
-            <a:off x="5011328" y="3739377"/>
-            <a:ext cx="553276" cy="648800"/>
+          <a:xfrm rot="10800000">
+            <a:off x="7474609" y="5927507"/>
+            <a:ext cx="422743" cy="128878"/>
           </a:xfrm>
           <a:prstGeom prst="bentConnector3">
-            <a:avLst>
-              <a:gd name="adj1" fmla="val 50000"/>
-            </a:avLst>
+            <a:avLst/>
           </a:prstGeom>
+          <a:ln>
+            <a:tailEnd type="triangle"/>
+          </a:ln>
         </p:spPr>
         <p:style>
           <a:lnRef idx="2">
@@ -4400,378 +5541,32 @@
       </p:cxnSp>
       <p:cxnSp>
         <p:nvCxnSpPr>
-          <p:cNvPr id="35" name="Connector: Elbow 34">
-            <a:extLst>
-              <a:ext uri="{FF2B5EF4-FFF2-40B4-BE49-F238E27FC236}">
-                <a16:creationId xmlns:a16="http://schemas.microsoft.com/office/drawing/2014/main" id="{C9F8FF0A-CC3B-D85F-14F7-F6AAFD2ED6EF}"/>
+          <p:cNvPr id="77" name="Connector: Elbow 76">
+            <a:extLst>
+              <a:ext uri="{FF2B5EF4-FFF2-40B4-BE49-F238E27FC236}">
+                <a16:creationId xmlns:a16="http://schemas.microsoft.com/office/drawing/2014/main" id="{1950D1BE-0348-1EA5-13D9-AA2199C3792C}"/>
               </a:ext>
             </a:extLst>
           </p:cNvPr>
           <p:cNvCxnSpPr>
-            <a:stCxn id="15" idx="2"/>
-            <a:endCxn id="9" idx="0"/>
+            <a:cxnSpLocks/>
+            <a:stCxn id="69" idx="1"/>
+            <a:endCxn id="81" idx="3"/>
           </p:cNvCxnSpPr>
           <p:nvPr/>
         </p:nvCxnSpPr>
         <p:spPr>
-          <a:xfrm rot="16200000" flipH="1">
-            <a:off x="3807999" y="3682644"/>
-            <a:ext cx="593118" cy="747436"/>
+          <a:xfrm rot="10800000">
+            <a:off x="7474609" y="3751853"/>
+            <a:ext cx="422743" cy="2304533"/>
           </a:xfrm>
           <a:prstGeom prst="bentConnector3">
             <a:avLst>
               <a:gd name="adj1" fmla="val 50000"/>
             </a:avLst>
           </a:prstGeom>
-        </p:spPr>
-        <p:style>
-          <a:lnRef idx="2">
-            <a:schemeClr val="accent1"/>
-          </a:lnRef>
-          <a:fillRef idx="0">
-            <a:schemeClr val="accent1"/>
-          </a:fillRef>
-          <a:effectRef idx="1">
-            <a:schemeClr val="accent1"/>
-          </a:effectRef>
-          <a:fontRef idx="minor">
-            <a:schemeClr val="tx1"/>
-          </a:fontRef>
-        </p:style>
-      </p:cxnSp>
-      <p:sp>
-        <p:nvSpPr>
-          <p:cNvPr id="49" name="Rectangle: Rounded Corners 48">
-            <a:extLst>
-              <a:ext uri="{FF2B5EF4-FFF2-40B4-BE49-F238E27FC236}">
-                <a16:creationId xmlns:a16="http://schemas.microsoft.com/office/drawing/2014/main" id="{EA045BB4-02E1-7CB8-438E-336304F8BEFC}"/>
-              </a:ext>
-            </a:extLst>
-          </p:cNvPr>
-          <p:cNvSpPr/>
-          <p:nvPr/>
-        </p:nvSpPr>
-        <p:spPr>
-          <a:xfrm>
-            <a:off x="1513770" y="2315964"/>
-            <a:ext cx="5528677" cy="726901"/>
-          </a:xfrm>
-          <a:prstGeom prst="roundRect">
-            <a:avLst/>
-          </a:prstGeom>
-          <a:solidFill>
-            <a:srgbClr val="D67A3B"/>
-          </a:solidFill>
           <a:ln>
-            <a:noFill/>
-          </a:ln>
-        </p:spPr>
-        <p:style>
-          <a:lnRef idx="2">
-            <a:schemeClr val="accent1">
-              <a:shade val="15000"/>
-            </a:schemeClr>
-          </a:lnRef>
-          <a:fillRef idx="1">
-            <a:schemeClr val="accent1"/>
-          </a:fillRef>
-          <a:effectRef idx="0">
-            <a:schemeClr val="accent1"/>
-          </a:effectRef>
-          <a:fontRef idx="minor">
-            <a:schemeClr val="lt1"/>
-          </a:fontRef>
-        </p:style>
-        <p:txBody>
-          <a:bodyPr rtlCol="0" anchor="ctr"/>
-          <a:lstStyle/>
-          <a:p>
-            <a:pPr algn="ctr"/>
-            <a:endParaRPr lang="en-SG" dirty="0"/>
-          </a:p>
-        </p:txBody>
-      </p:sp>
-      <p:sp>
-        <p:nvSpPr>
-          <p:cNvPr id="50" name="TextBox 49">
-            <a:extLst>
-              <a:ext uri="{FF2B5EF4-FFF2-40B4-BE49-F238E27FC236}">
-                <a16:creationId xmlns:a16="http://schemas.microsoft.com/office/drawing/2014/main" id="{033C95A0-8B87-3913-A665-E1AED7872846}"/>
-              </a:ext>
-            </a:extLst>
-          </p:cNvPr>
-          <p:cNvSpPr txBox="1"/>
-          <p:nvPr/>
-        </p:nvSpPr>
-        <p:spPr>
-          <a:xfrm>
-            <a:off x="1636303" y="2326390"/>
-            <a:ext cx="1391555" cy="600164"/>
-          </a:xfrm>
-          <a:prstGeom prst="rect">
-            <a:avLst/>
-          </a:prstGeom>
-          <a:noFill/>
-        </p:spPr>
-        <p:txBody>
-          <a:bodyPr wrap="square" rtlCol="0">
-            <a:spAutoFit/>
-          </a:bodyPr>
-          <a:lstStyle/>
-          <a:p>
-            <a:r>
-              <a:rPr lang="en-US" sz="1100" b="1" dirty="0">
-                <a:solidFill>
-                  <a:schemeClr val="bg1"/>
-                </a:solidFill>
-              </a:rPr>
-              <a:t>Level 2</a:t>
-            </a:r>
-          </a:p>
-          <a:p>
-            <a:r>
-              <a:rPr lang="en-US" sz="1100" dirty="0">
-                <a:solidFill>
-                  <a:schemeClr val="bg1"/>
-                </a:solidFill>
-              </a:rPr>
-              <a:t>Control Center (HQ) Processing LAN</a:t>
-            </a:r>
-          </a:p>
-        </p:txBody>
-      </p:sp>
-      <p:sp>
-        <p:nvSpPr>
-          <p:cNvPr id="51" name="TextBox 50">
-            <a:extLst>
-              <a:ext uri="{FF2B5EF4-FFF2-40B4-BE49-F238E27FC236}">
-                <a16:creationId xmlns:a16="http://schemas.microsoft.com/office/drawing/2014/main" id="{5D569A22-E2F8-0826-B7AE-58B88D739DB7}"/>
-              </a:ext>
-            </a:extLst>
-          </p:cNvPr>
-          <p:cNvSpPr txBox="1"/>
-          <p:nvPr/>
-        </p:nvSpPr>
-        <p:spPr>
-          <a:xfrm>
-            <a:off x="3548625" y="2389939"/>
-            <a:ext cx="1471373" cy="261610"/>
-          </a:xfrm>
-          <a:prstGeom prst="rect">
-            <a:avLst/>
-          </a:prstGeom>
-          <a:noFill/>
-        </p:spPr>
-        <p:txBody>
-          <a:bodyPr wrap="square" rtlCol="0">
-            <a:spAutoFit/>
-          </a:bodyPr>
-          <a:lstStyle/>
-          <a:p>
-            <a:r>
-              <a:rPr lang="en-SG" sz="1100" dirty="0">
-                <a:solidFill>
-                  <a:schemeClr val="bg1"/>
-                </a:solidFill>
-              </a:rPr>
-              <a:t>MQTT Broker Server </a:t>
-            </a:r>
-          </a:p>
-        </p:txBody>
-      </p:sp>
-      <p:pic>
-        <p:nvPicPr>
-          <p:cNvPr id="54" name="Graphic 53" descr="Computer with solid fill">
-            <a:extLst>
-              <a:ext uri="{FF2B5EF4-FFF2-40B4-BE49-F238E27FC236}">
-                <a16:creationId xmlns:a16="http://schemas.microsoft.com/office/drawing/2014/main" id="{6F931331-CF0E-CDB1-A653-DFA5C93DD7C2}"/>
-              </a:ext>
-            </a:extLst>
-          </p:cNvPr>
-          <p:cNvPicPr>
-            <a:picLocks noChangeAspect="1"/>
-          </p:cNvPicPr>
-          <p:nvPr/>
-        </p:nvPicPr>
-        <p:blipFill>
-          <a:blip>
-            <a:extLst>
-              <a:ext uri="{28A0092B-C50C-407E-A947-70E740481C1C}">
-                <a14:useLocalDpi xmlns:a14="http://schemas.microsoft.com/office/drawing/2010/main" val="0"/>
-              </a:ext>
-              <a:ext uri="{96DAC541-7B7A-43D3-8B79-37D633B846F1}">
-                <asvg:svgBlip xmlns:asvg="http://schemas.microsoft.com/office/drawing/2016/SVG/main" r:embed="rId4"/>
-              </a:ext>
-            </a:extLst>
-          </a:blip>
-          <a:stretch>
-            <a:fillRect/>
-          </a:stretch>
-        </p:blipFill>
-        <p:spPr>
-          <a:xfrm>
-            <a:off x="3101032" y="2434371"/>
-            <a:ext cx="446421" cy="446421"/>
-          </a:xfrm>
-          <a:prstGeom prst="rect">
-            <a:avLst/>
-          </a:prstGeom>
-        </p:spPr>
-      </p:pic>
-      <p:pic>
-        <p:nvPicPr>
-          <p:cNvPr id="55" name="Graphic 54" descr="Ui Ux with solid fill">
-            <a:extLst>
-              <a:ext uri="{FF2B5EF4-FFF2-40B4-BE49-F238E27FC236}">
-                <a16:creationId xmlns:a16="http://schemas.microsoft.com/office/drawing/2014/main" id="{E646BA4E-4971-C662-B2AF-D7D19C7BDBED}"/>
-              </a:ext>
-            </a:extLst>
-          </p:cNvPr>
-          <p:cNvPicPr>
-            <a:picLocks noChangeAspect="1"/>
-          </p:cNvPicPr>
-          <p:nvPr/>
-        </p:nvPicPr>
-        <p:blipFill>
-          <a:blip>
-            <a:extLst>
-              <a:ext uri="{28A0092B-C50C-407E-A947-70E740481C1C}">
-                <a14:useLocalDpi xmlns:a14="http://schemas.microsoft.com/office/drawing/2010/main" val="0"/>
-              </a:ext>
-              <a:ext uri="{96DAC541-7B7A-43D3-8B79-37D633B846F1}">
-                <asvg:svgBlip xmlns:asvg="http://schemas.microsoft.com/office/drawing/2016/SVG/main" r:embed="rId5"/>
-              </a:ext>
-            </a:extLst>
-          </a:blip>
-          <a:stretch>
-            <a:fillRect/>
-          </a:stretch>
-        </p:blipFill>
-        <p:spPr>
-          <a:xfrm>
-            <a:off x="5097965" y="2459578"/>
-            <a:ext cx="550375" cy="550375"/>
-          </a:xfrm>
-          <a:prstGeom prst="rect">
-            <a:avLst/>
-          </a:prstGeom>
-        </p:spPr>
-      </p:pic>
-      <p:sp>
-        <p:nvSpPr>
-          <p:cNvPr id="56" name="TextBox 55">
-            <a:extLst>
-              <a:ext uri="{FF2B5EF4-FFF2-40B4-BE49-F238E27FC236}">
-                <a16:creationId xmlns:a16="http://schemas.microsoft.com/office/drawing/2014/main" id="{CB167245-CB3A-9A72-E5F0-A87AC53F2AE1}"/>
-              </a:ext>
-            </a:extLst>
-          </p:cNvPr>
-          <p:cNvSpPr txBox="1"/>
-          <p:nvPr/>
-        </p:nvSpPr>
-        <p:spPr>
-          <a:xfrm>
-            <a:off x="7874679" y="3620423"/>
-            <a:ext cx="966069" cy="430887"/>
-          </a:xfrm>
-          <a:prstGeom prst="rect">
-            <a:avLst/>
-          </a:prstGeom>
-          <a:noFill/>
-        </p:spPr>
-        <p:txBody>
-          <a:bodyPr wrap="square" rtlCol="0">
-            <a:spAutoFit/>
-          </a:bodyPr>
-          <a:lstStyle/>
-          <a:p>
-            <a:r>
-              <a:rPr lang="en-US" sz="1100" dirty="0">
-                <a:solidFill>
-                  <a:schemeClr val="bg1"/>
-                </a:solidFill>
-              </a:rPr>
-              <a:t>Railway Track Control HMI</a:t>
-            </a:r>
-            <a:endParaRPr lang="en-SG" sz="1100" dirty="0">
-              <a:solidFill>
-                <a:schemeClr val="bg1"/>
-              </a:solidFill>
-            </a:endParaRPr>
-          </a:p>
-        </p:txBody>
-      </p:sp>
-      <p:sp>
-        <p:nvSpPr>
-          <p:cNvPr id="57" name="TextBox 56">
-            <a:extLst>
-              <a:ext uri="{FF2B5EF4-FFF2-40B4-BE49-F238E27FC236}">
-                <a16:creationId xmlns:a16="http://schemas.microsoft.com/office/drawing/2014/main" id="{18F1823D-7A98-9481-2731-0F15ECBFBC8B}"/>
-              </a:ext>
-            </a:extLst>
-          </p:cNvPr>
-          <p:cNvSpPr txBox="1"/>
-          <p:nvPr/>
-        </p:nvSpPr>
-        <p:spPr>
-          <a:xfrm>
-            <a:off x="5668987" y="2410749"/>
-            <a:ext cx="922167" cy="600164"/>
-          </a:xfrm>
-          <a:prstGeom prst="rect">
-            <a:avLst/>
-          </a:prstGeom>
-          <a:noFill/>
-        </p:spPr>
-        <p:txBody>
-          <a:bodyPr wrap="square" rtlCol="0">
-            <a:spAutoFit/>
-          </a:bodyPr>
-          <a:lstStyle/>
-          <a:p>
-            <a:r>
-              <a:rPr lang="en-US" sz="1100" dirty="0">
-                <a:solidFill>
-                  <a:schemeClr val="bg1"/>
-                </a:solidFill>
-              </a:rPr>
-              <a:t>Control HMI / Console machine </a:t>
-            </a:r>
-            <a:endParaRPr lang="en-SG" sz="1100" dirty="0">
-              <a:solidFill>
-                <a:schemeClr val="bg1"/>
-              </a:solidFill>
-            </a:endParaRPr>
-          </a:p>
-        </p:txBody>
-      </p:sp>
-      <p:cxnSp>
-        <p:nvCxnSpPr>
-          <p:cNvPr id="58" name="Straight Connector 57">
-            <a:extLst>
-              <a:ext uri="{FF2B5EF4-FFF2-40B4-BE49-F238E27FC236}">
-                <a16:creationId xmlns:a16="http://schemas.microsoft.com/office/drawing/2014/main" id="{5789B378-9903-3123-F7BE-BA64054115F6}"/>
-              </a:ext>
-            </a:extLst>
-          </p:cNvPr>
-          <p:cNvCxnSpPr>
-            <a:cxnSpLocks/>
-          </p:cNvCxnSpPr>
-          <p:nvPr/>
-        </p:nvCxnSpPr>
-        <p:spPr>
-          <a:xfrm>
-            <a:off x="3312071" y="2972223"/>
-            <a:ext cx="1088479" cy="0"/>
-          </a:xfrm>
-          <a:prstGeom prst="line">
-            <a:avLst/>
-          </a:prstGeom>
-          <a:ln>
-            <a:solidFill>
-              <a:schemeClr val="tx1"/>
-            </a:solidFill>
-            <a:prstDash val="sysDash"/>
+            <a:tailEnd type="triangle"/>
           </a:ln>
         </p:spPr>
         <p:style>
@@ -4791,74 +5586,28 @@
       </p:cxnSp>
       <p:cxnSp>
         <p:nvCxnSpPr>
-          <p:cNvPr id="64" name="Connector: Elbow 63">
-            <a:extLst>
-              <a:ext uri="{FF2B5EF4-FFF2-40B4-BE49-F238E27FC236}">
-                <a16:creationId xmlns:a16="http://schemas.microsoft.com/office/drawing/2014/main" id="{E17D7B93-3D52-6A63-2CAE-3B373903F065}"/>
+          <p:cNvPr id="99" name="Straight Arrow Connector 98">
+            <a:extLst>
+              <a:ext uri="{FF2B5EF4-FFF2-40B4-BE49-F238E27FC236}">
+                <a16:creationId xmlns:a16="http://schemas.microsoft.com/office/drawing/2014/main" id="{6FEA84D2-D10D-7D77-65C4-5A54F058D84C}"/>
               </a:ext>
             </a:extLst>
           </p:cNvPr>
           <p:cNvCxnSpPr>
-            <a:cxnSpLocks/>
-            <a:endCxn id="14" idx="1"/>
+            <a:stCxn id="114" idx="1"/>
           </p:cNvCxnSpPr>
           <p:nvPr/>
         </p:nvCxnSpPr>
         <p:spPr>
-          <a:xfrm rot="16200000" flipH="1">
-            <a:off x="4105673" y="3025260"/>
-            <a:ext cx="529982" cy="521092"/>
-          </a:xfrm>
-          <a:prstGeom prst="bentConnector2">
+          <a:xfrm flipH="1" flipV="1">
+            <a:off x="7490035" y="3599698"/>
+            <a:ext cx="371372" cy="1004"/>
+          </a:xfrm>
+          <a:prstGeom prst="straightConnector1">
             <a:avLst/>
           </a:prstGeom>
           <a:ln>
-            <a:prstDash val="sysDash"/>
-          </a:ln>
-        </p:spPr>
-        <p:style>
-          <a:lnRef idx="2">
-            <a:schemeClr val="dk1"/>
-          </a:lnRef>
-          <a:fillRef idx="0">
-            <a:schemeClr val="dk1"/>
-          </a:fillRef>
-          <a:effectRef idx="1">
-            <a:schemeClr val="dk1"/>
-          </a:effectRef>
-          <a:fontRef idx="minor">
-            <a:schemeClr val="tx1"/>
-          </a:fontRef>
-        </p:style>
-      </p:cxnSp>
-      <p:cxnSp>
-        <p:nvCxnSpPr>
-          <p:cNvPr id="67" name="Straight Connector 66">
-            <a:extLst>
-              <a:ext uri="{FF2B5EF4-FFF2-40B4-BE49-F238E27FC236}">
-                <a16:creationId xmlns:a16="http://schemas.microsoft.com/office/drawing/2014/main" id="{9085F8B8-30AA-8B36-DBEE-23D06A53EEC9}"/>
-              </a:ext>
-            </a:extLst>
-          </p:cNvPr>
-          <p:cNvCxnSpPr>
-            <a:cxnSpLocks/>
-            <a:endCxn id="15" idx="0"/>
-          </p:cNvCxnSpPr>
-          <p:nvPr/>
-        </p:nvCxnSpPr>
-        <p:spPr>
-          <a:xfrm>
-            <a:off x="3730839" y="2950968"/>
-            <a:ext cx="1" cy="295362"/>
-          </a:xfrm>
-          <a:prstGeom prst="line">
-            <a:avLst/>
-          </a:prstGeom>
-          <a:ln>
-            <a:solidFill>
-              <a:schemeClr val="tx1"/>
-            </a:solidFill>
-            <a:prstDash val="sysDash"/>
+            <a:tailEnd type="triangle"/>
           </a:ln>
         </p:spPr>
         <p:style>
@@ -4876,72 +5625,34 @@
           </a:fontRef>
         </p:style>
       </p:cxnSp>
-      <p:cxnSp>
-        <p:nvCxnSpPr>
-          <p:cNvPr id="75" name="Straight Connector 74">
-            <a:extLst>
-              <a:ext uri="{FF2B5EF4-FFF2-40B4-BE49-F238E27FC236}">
-                <a16:creationId xmlns:a16="http://schemas.microsoft.com/office/drawing/2014/main" id="{B982C9C0-B90A-77C5-9E1B-E8EED6AF2A97}"/>
-              </a:ext>
-            </a:extLst>
-          </p:cNvPr>
-          <p:cNvCxnSpPr>
-            <a:cxnSpLocks/>
-          </p:cNvCxnSpPr>
+      <p:sp>
+        <p:nvSpPr>
+          <p:cNvPr id="2" name="TextBox 1">
+            <a:extLst>
+              <a:ext uri="{FF2B5EF4-FFF2-40B4-BE49-F238E27FC236}">
+                <a16:creationId xmlns:a16="http://schemas.microsoft.com/office/drawing/2014/main" id="{D41AB997-DBE4-9D12-D950-44E7E2CF2329}"/>
+              </a:ext>
+            </a:extLst>
+          </p:cNvPr>
+          <p:cNvSpPr txBox="1"/>
           <p:nvPr/>
-        </p:nvCxnSpPr>
-        <p:spPr>
-          <a:xfrm flipV="1">
-            <a:off x="3523111" y="2769956"/>
-            <a:ext cx="1595735" cy="1600"/>
-          </a:xfrm>
-          <a:prstGeom prst="line">
+        </p:nvSpPr>
+        <p:spPr>
+          <a:xfrm>
+            <a:off x="562555" y="907481"/>
+            <a:ext cx="10759373" cy="461665"/>
+          </a:xfrm>
+          <a:prstGeom prst="rect">
             <a:avLst/>
           </a:prstGeom>
-          <a:ln>
+          <a:noFill/>
+          <a:ln w="28575">
             <a:solidFill>
               <a:schemeClr val="tx1"/>
             </a:solidFill>
             <a:prstDash val="sysDash"/>
           </a:ln>
         </p:spPr>
-        <p:style>
-          <a:lnRef idx="2">
-            <a:schemeClr val="accent1"/>
-          </a:lnRef>
-          <a:fillRef idx="0">
-            <a:schemeClr val="accent1"/>
-          </a:fillRef>
-          <a:effectRef idx="1">
-            <a:schemeClr val="accent1"/>
-          </a:effectRef>
-          <a:fontRef idx="minor">
-            <a:schemeClr val="tx1"/>
-          </a:fontRef>
-        </p:style>
-      </p:cxnSp>
-      <p:sp>
-        <p:nvSpPr>
-          <p:cNvPr id="80" name="TextBox 79">
-            <a:extLst>
-              <a:ext uri="{FF2B5EF4-FFF2-40B4-BE49-F238E27FC236}">
-                <a16:creationId xmlns:a16="http://schemas.microsoft.com/office/drawing/2014/main" id="{393A9111-C8F6-8825-72CA-3522CEA1FF8F}"/>
-              </a:ext>
-            </a:extLst>
-          </p:cNvPr>
-          <p:cNvSpPr txBox="1"/>
-          <p:nvPr/>
-        </p:nvSpPr>
-        <p:spPr>
-          <a:xfrm>
-            <a:off x="1632142" y="1389411"/>
-            <a:ext cx="1324806" cy="600164"/>
-          </a:xfrm>
-          <a:prstGeom prst="rect">
-            <a:avLst/>
-          </a:prstGeom>
-          <a:noFill/>
-        </p:spPr>
         <p:txBody>
           <a:bodyPr wrap="square" rtlCol="0">
             <a:spAutoFit/>
@@ -4949,738 +5660,17 @@
           <a:lstStyle/>
           <a:p>
             <a:r>
-              <a:rPr lang="en-US" sz="1100" b="1" dirty="0">
-                <a:solidFill>
-                  <a:schemeClr val="bg1"/>
-                </a:solidFill>
-              </a:rPr>
-              <a:t>Level 3</a:t>
-            </a:r>
-          </a:p>
-          <a:p>
-            <a:r>
-              <a:rPr lang="en-US" sz="1100" dirty="0">
-                <a:solidFill>
-                  <a:schemeClr val="bg1"/>
-                </a:solidFill>
-              </a:rPr>
-              <a:t>Operations Management Zone </a:t>
-            </a:r>
-          </a:p>
-        </p:txBody>
-      </p:sp>
-      <p:pic>
-        <p:nvPicPr>
-          <p:cNvPr id="83" name="Graphic 82" descr="Ui Ux with solid fill">
-            <a:extLst>
-              <a:ext uri="{FF2B5EF4-FFF2-40B4-BE49-F238E27FC236}">
-                <a16:creationId xmlns:a16="http://schemas.microsoft.com/office/drawing/2014/main" id="{25C9A69D-991D-5B40-0C5E-96302FC149CC}"/>
-              </a:ext>
-            </a:extLst>
-          </p:cNvPr>
-          <p:cNvPicPr>
-            <a:picLocks noChangeAspect="1"/>
-          </p:cNvPicPr>
-          <p:nvPr/>
-        </p:nvPicPr>
-        <p:blipFill>
-          <a:blip>
-            <a:extLst>
-              <a:ext uri="{28A0092B-C50C-407E-A947-70E740481C1C}">
-                <a14:useLocalDpi xmlns:a14="http://schemas.microsoft.com/office/drawing/2010/main" val="0"/>
-              </a:ext>
-              <a:ext uri="{96DAC541-7B7A-43D3-8B79-37D633B846F1}">
-                <asvg:svgBlip xmlns:asvg="http://schemas.microsoft.com/office/drawing/2016/SVG/main" r:embed="rId5"/>
-              </a:ext>
-            </a:extLst>
-          </a:blip>
-          <a:stretch>
-            <a:fillRect/>
-          </a:stretch>
-        </p:blipFill>
-        <p:spPr>
-          <a:xfrm>
-            <a:off x="3914979" y="1455059"/>
-            <a:ext cx="572105" cy="572105"/>
-          </a:xfrm>
-          <a:prstGeom prst="rect">
-            <a:avLst/>
-          </a:prstGeom>
-        </p:spPr>
-      </p:pic>
-      <p:pic>
-        <p:nvPicPr>
-          <p:cNvPr id="92" name="Graphic 91" descr="Smart Phone with solid fill">
-            <a:extLst>
-              <a:ext uri="{FF2B5EF4-FFF2-40B4-BE49-F238E27FC236}">
-                <a16:creationId xmlns:a16="http://schemas.microsoft.com/office/drawing/2014/main" id="{AB93BEFD-64A8-D824-B50B-BED279B56A9F}"/>
-              </a:ext>
-            </a:extLst>
-          </p:cNvPr>
-          <p:cNvPicPr>
-            <a:picLocks noChangeAspect="1"/>
-          </p:cNvPicPr>
-          <p:nvPr/>
-        </p:nvPicPr>
-        <p:blipFill>
-          <a:blip>
-            <a:extLst>
-              <a:ext uri="{96DAC541-7B7A-43D3-8B79-37D633B846F1}">
-                <asvg:svgBlip xmlns:asvg="http://schemas.microsoft.com/office/drawing/2016/SVG/main" r:embed="rId6"/>
-              </a:ext>
-            </a:extLst>
-          </a:blip>
-          <a:stretch>
-            <a:fillRect/>
-          </a:stretch>
-        </p:blipFill>
-        <p:spPr>
-          <a:xfrm>
-            <a:off x="5152996" y="1458938"/>
-            <a:ext cx="557955" cy="557955"/>
-          </a:xfrm>
-          <a:prstGeom prst="rect">
-            <a:avLst/>
-          </a:prstGeom>
-        </p:spPr>
-      </p:pic>
-      <p:sp>
-        <p:nvSpPr>
-          <p:cNvPr id="93" name="TextBox 92">
-            <a:extLst>
-              <a:ext uri="{FF2B5EF4-FFF2-40B4-BE49-F238E27FC236}">
-                <a16:creationId xmlns:a16="http://schemas.microsoft.com/office/drawing/2014/main" id="{87E0CAF7-1E85-F4AE-9B86-E2AF0B15BE78}"/>
-              </a:ext>
-            </a:extLst>
-          </p:cNvPr>
-          <p:cNvSpPr txBox="1"/>
-          <p:nvPr/>
-        </p:nvSpPr>
-        <p:spPr>
-          <a:xfrm>
-            <a:off x="5678325" y="1500904"/>
-            <a:ext cx="1272511" cy="430887"/>
-          </a:xfrm>
-          <a:prstGeom prst="rect">
-            <a:avLst/>
-          </a:prstGeom>
-          <a:noFill/>
-        </p:spPr>
-        <p:txBody>
-          <a:bodyPr wrap="square" rtlCol="0">
-            <a:spAutoFit/>
-          </a:bodyPr>
-          <a:lstStyle/>
-          <a:p>
-            <a:r>
-              <a:rPr lang="en-SG" sz="1100" dirty="0">
-                <a:solidFill>
-                  <a:schemeClr val="bg1"/>
-                </a:solidFill>
-              </a:rPr>
-              <a:t>Control Touch Screen/Phone</a:t>
-            </a:r>
-          </a:p>
-        </p:txBody>
-      </p:sp>
-      <p:sp>
-        <p:nvSpPr>
-          <p:cNvPr id="94" name="TextBox 93">
-            <a:extLst>
-              <a:ext uri="{FF2B5EF4-FFF2-40B4-BE49-F238E27FC236}">
-                <a16:creationId xmlns:a16="http://schemas.microsoft.com/office/drawing/2014/main" id="{9D41C0FF-A27A-EDDD-BFEE-3DF571D620F6}"/>
-              </a:ext>
-            </a:extLst>
-          </p:cNvPr>
-          <p:cNvSpPr txBox="1"/>
-          <p:nvPr/>
-        </p:nvSpPr>
-        <p:spPr>
-          <a:xfrm>
-            <a:off x="4478276" y="1508536"/>
-            <a:ext cx="804901" cy="430887"/>
-          </a:xfrm>
-          <a:prstGeom prst="rect">
-            <a:avLst/>
-          </a:prstGeom>
-          <a:noFill/>
-        </p:spPr>
-        <p:txBody>
-          <a:bodyPr wrap="square" rtlCol="0">
-            <a:spAutoFit/>
-          </a:bodyPr>
-          <a:lstStyle/>
-          <a:p>
-            <a:r>
-              <a:rPr lang="en-SG" sz="1100" dirty="0">
-                <a:solidFill>
-                  <a:schemeClr val="bg1"/>
-                </a:solidFill>
-              </a:rPr>
-              <a:t>Monitor Desktop</a:t>
-            </a:r>
-          </a:p>
-        </p:txBody>
-      </p:sp>
-      <p:cxnSp>
-        <p:nvCxnSpPr>
-          <p:cNvPr id="102" name="Straight Connector 101">
-            <a:extLst>
-              <a:ext uri="{FF2B5EF4-FFF2-40B4-BE49-F238E27FC236}">
-                <a16:creationId xmlns:a16="http://schemas.microsoft.com/office/drawing/2014/main" id="{EBCEFDA0-13CC-0309-E415-50A9C59B2777}"/>
-              </a:ext>
-            </a:extLst>
-          </p:cNvPr>
-          <p:cNvCxnSpPr>
-            <a:cxnSpLocks/>
-          </p:cNvCxnSpPr>
-          <p:nvPr/>
-        </p:nvCxnSpPr>
-        <p:spPr>
-          <a:xfrm flipH="1">
-            <a:off x="7369390" y="4709312"/>
-            <a:ext cx="505288" cy="0"/>
-          </a:xfrm>
-          <a:prstGeom prst="line">
-            <a:avLst/>
-          </a:prstGeom>
-          <a:ln>
-            <a:solidFill>
-              <a:schemeClr val="tx1"/>
-            </a:solidFill>
-            <a:prstDash val="sysDash"/>
-          </a:ln>
-        </p:spPr>
-        <p:style>
-          <a:lnRef idx="2">
-            <a:schemeClr val="accent1"/>
-          </a:lnRef>
-          <a:fillRef idx="0">
-            <a:schemeClr val="accent1"/>
-          </a:fillRef>
-          <a:effectRef idx="1">
-            <a:schemeClr val="accent1"/>
-          </a:effectRef>
-          <a:fontRef idx="minor">
-            <a:schemeClr val="tx1"/>
-          </a:fontRef>
-        </p:style>
-      </p:cxnSp>
-      <p:sp>
-        <p:nvSpPr>
-          <p:cNvPr id="104" name="TextBox 103">
-            <a:extLst>
-              <a:ext uri="{FF2B5EF4-FFF2-40B4-BE49-F238E27FC236}">
-                <a16:creationId xmlns:a16="http://schemas.microsoft.com/office/drawing/2014/main" id="{449CB5C1-AE5E-9A1B-0C8A-089939B0B1B2}"/>
-              </a:ext>
-            </a:extLst>
-          </p:cNvPr>
-          <p:cNvSpPr txBox="1"/>
-          <p:nvPr/>
-        </p:nvSpPr>
-        <p:spPr>
-          <a:xfrm>
-            <a:off x="7939387" y="4539996"/>
-            <a:ext cx="2366017" cy="261610"/>
-          </a:xfrm>
-          <a:prstGeom prst="rect">
-            <a:avLst/>
-          </a:prstGeom>
-          <a:noFill/>
-        </p:spPr>
-        <p:txBody>
-          <a:bodyPr wrap="square" rtlCol="0">
-            <a:spAutoFit/>
-          </a:bodyPr>
-          <a:lstStyle/>
-          <a:p>
-            <a:r>
-              <a:rPr lang="en-SG" sz="1100" b="1" dirty="0"/>
-              <a:t>MQTT Communication Channel</a:t>
-            </a:r>
-          </a:p>
-        </p:txBody>
-      </p:sp>
-      <p:sp>
-        <p:nvSpPr>
-          <p:cNvPr id="106" name="TextBox 105">
-            <a:extLst>
-              <a:ext uri="{FF2B5EF4-FFF2-40B4-BE49-F238E27FC236}">
-                <a16:creationId xmlns:a16="http://schemas.microsoft.com/office/drawing/2014/main" id="{6415396D-9C53-1587-417D-9A32007E22A8}"/>
-              </a:ext>
-            </a:extLst>
-          </p:cNvPr>
-          <p:cNvSpPr txBox="1"/>
-          <p:nvPr/>
-        </p:nvSpPr>
-        <p:spPr>
-          <a:xfrm>
-            <a:off x="2884403" y="4116279"/>
-            <a:ext cx="1043427" cy="261610"/>
-          </a:xfrm>
-          <a:prstGeom prst="rect">
-            <a:avLst/>
-          </a:prstGeom>
-          <a:noFill/>
-        </p:spPr>
-        <p:txBody>
-          <a:bodyPr wrap="square" rtlCol="0">
-            <a:spAutoFit/>
-          </a:bodyPr>
-          <a:lstStyle/>
-          <a:p>
-            <a:r>
-              <a:rPr lang="en-SG" sz="1100" b="1" dirty="0">
-                <a:solidFill>
-                  <a:schemeClr val="accent4">
-                    <a:lumMod val="20000"/>
-                    <a:lumOff val="80000"/>
-                  </a:schemeClr>
-                </a:solidFill>
-              </a:rPr>
-              <a:t>MQTT Client</a:t>
-            </a:r>
-          </a:p>
-        </p:txBody>
-      </p:sp>
-      <p:sp>
-        <p:nvSpPr>
-          <p:cNvPr id="109" name="TextBox 108">
-            <a:extLst>
-              <a:ext uri="{FF2B5EF4-FFF2-40B4-BE49-F238E27FC236}">
-                <a16:creationId xmlns:a16="http://schemas.microsoft.com/office/drawing/2014/main" id="{A4BFA4F3-5EF4-46A0-0227-93E0F59487AB}"/>
-              </a:ext>
-            </a:extLst>
-          </p:cNvPr>
-          <p:cNvSpPr txBox="1"/>
-          <p:nvPr/>
-        </p:nvSpPr>
-        <p:spPr>
-          <a:xfrm>
-            <a:off x="3965025" y="3203835"/>
-            <a:ext cx="1043427" cy="261610"/>
-          </a:xfrm>
-          <a:prstGeom prst="rect">
-            <a:avLst/>
-          </a:prstGeom>
-          <a:noFill/>
-        </p:spPr>
-        <p:txBody>
-          <a:bodyPr wrap="square" rtlCol="0">
-            <a:spAutoFit/>
-          </a:bodyPr>
-          <a:lstStyle/>
-          <a:p>
-            <a:r>
-              <a:rPr lang="en-SG" sz="1100" b="1" dirty="0">
-                <a:solidFill>
-                  <a:schemeClr val="accent4">
-                    <a:lumMod val="75000"/>
-                  </a:schemeClr>
-                </a:solidFill>
-              </a:rPr>
-              <a:t>MQTT Client</a:t>
-            </a:r>
-          </a:p>
-        </p:txBody>
-      </p:sp>
-      <p:sp>
-        <p:nvSpPr>
-          <p:cNvPr id="110" name="TextBox 109">
-            <a:extLst>
-              <a:ext uri="{FF2B5EF4-FFF2-40B4-BE49-F238E27FC236}">
-                <a16:creationId xmlns:a16="http://schemas.microsoft.com/office/drawing/2014/main" id="{5D73D2FF-9E4E-AB67-962A-FAB6F39B7120}"/>
-              </a:ext>
-            </a:extLst>
-          </p:cNvPr>
-          <p:cNvSpPr txBox="1"/>
-          <p:nvPr/>
-        </p:nvSpPr>
-        <p:spPr>
-          <a:xfrm>
-            <a:off x="7419914" y="3600000"/>
-            <a:ext cx="2609906" cy="646331"/>
-          </a:xfrm>
-          <a:prstGeom prst="rect">
-            <a:avLst/>
-          </a:prstGeom>
-          <a:noFill/>
-          <a:ln w="19050">
-            <a:solidFill>
-              <a:srgbClr val="FF0000"/>
-            </a:solidFill>
-            <a:prstDash val="sysDash"/>
-          </a:ln>
-        </p:spPr>
-        <p:txBody>
-          <a:bodyPr wrap="square" rtlCol="0">
-            <a:spAutoFit/>
-          </a:bodyPr>
-          <a:lstStyle/>
-          <a:p>
-            <a:r>
-              <a:rPr lang="en-US" sz="1200" b="1" dirty="0"/>
-              <a:t>Provide The MQTT Client connection interface lib to publish the data to the broker server</a:t>
-            </a:r>
-            <a:endParaRPr lang="en-SG" sz="1200" b="1" dirty="0"/>
-          </a:p>
-        </p:txBody>
-      </p:sp>
-      <p:cxnSp>
-        <p:nvCxnSpPr>
-          <p:cNvPr id="112" name="Connector: Elbow 111">
-            <a:extLst>
-              <a:ext uri="{FF2B5EF4-FFF2-40B4-BE49-F238E27FC236}">
-                <a16:creationId xmlns:a16="http://schemas.microsoft.com/office/drawing/2014/main" id="{0A9A1C01-9B9C-82AD-6BDE-BDE5978CC6B5}"/>
-              </a:ext>
-            </a:extLst>
-          </p:cNvPr>
-          <p:cNvCxnSpPr>
-            <a:cxnSpLocks/>
-            <a:stCxn id="110" idx="1"/>
-            <a:endCxn id="12" idx="3"/>
-          </p:cNvCxnSpPr>
-          <p:nvPr/>
-        </p:nvCxnSpPr>
-        <p:spPr>
-          <a:xfrm rot="10800000">
-            <a:off x="7042448" y="3594894"/>
-            <a:ext cx="377467" cy="328272"/>
-          </a:xfrm>
-          <a:prstGeom prst="bentConnector3">
-            <a:avLst>
-              <a:gd name="adj1" fmla="val 50000"/>
-            </a:avLst>
-          </a:prstGeom>
-          <a:ln>
-            <a:solidFill>
-              <a:srgbClr val="FF0000"/>
-            </a:solidFill>
-            <a:tailEnd type="triangle"/>
-          </a:ln>
-        </p:spPr>
-        <p:style>
-          <a:lnRef idx="2">
-            <a:schemeClr val="accent1"/>
-          </a:lnRef>
-          <a:fillRef idx="0">
-            <a:schemeClr val="accent1"/>
-          </a:fillRef>
-          <a:effectRef idx="1">
-            <a:schemeClr val="accent1"/>
-          </a:effectRef>
-          <a:fontRef idx="minor">
-            <a:schemeClr val="tx1"/>
-          </a:fontRef>
-        </p:style>
-      </p:cxnSp>
-      <p:cxnSp>
-        <p:nvCxnSpPr>
-          <p:cNvPr id="114" name="Connector: Elbow 113">
-            <a:extLst>
-              <a:ext uri="{FF2B5EF4-FFF2-40B4-BE49-F238E27FC236}">
-                <a16:creationId xmlns:a16="http://schemas.microsoft.com/office/drawing/2014/main" id="{59F7EB0E-EC13-D766-51E9-5DA6BC03650F}"/>
-              </a:ext>
-            </a:extLst>
-          </p:cNvPr>
-          <p:cNvCxnSpPr>
-            <a:cxnSpLocks/>
-            <a:stCxn id="110" idx="1"/>
-            <a:endCxn id="4" idx="3"/>
-          </p:cNvCxnSpPr>
-          <p:nvPr/>
-        </p:nvCxnSpPr>
-        <p:spPr>
-          <a:xfrm rot="10800000" flipV="1">
-            <a:off x="7042448" y="3923165"/>
-            <a:ext cx="377467" cy="605005"/>
-          </a:xfrm>
-          <a:prstGeom prst="bentConnector3">
-            <a:avLst>
-              <a:gd name="adj1" fmla="val 50000"/>
-            </a:avLst>
-          </a:prstGeom>
-          <a:ln>
-            <a:solidFill>
-              <a:srgbClr val="FF0000"/>
-            </a:solidFill>
-            <a:tailEnd type="triangle"/>
-          </a:ln>
-        </p:spPr>
-        <p:style>
-          <a:lnRef idx="2">
-            <a:schemeClr val="accent1"/>
-          </a:lnRef>
-          <a:fillRef idx="0">
-            <a:schemeClr val="accent1"/>
-          </a:fillRef>
-          <a:effectRef idx="1">
-            <a:schemeClr val="accent1"/>
-          </a:effectRef>
-          <a:fontRef idx="minor">
-            <a:schemeClr val="tx1"/>
-          </a:fontRef>
-        </p:style>
-      </p:cxnSp>
-      <p:sp>
-        <p:nvSpPr>
-          <p:cNvPr id="117" name="TextBox 116">
-            <a:extLst>
-              <a:ext uri="{FF2B5EF4-FFF2-40B4-BE49-F238E27FC236}">
-                <a16:creationId xmlns:a16="http://schemas.microsoft.com/office/drawing/2014/main" id="{982619E8-0251-109B-BCA4-DE8EA01FA204}"/>
-              </a:ext>
-            </a:extLst>
-          </p:cNvPr>
-          <p:cNvSpPr txBox="1"/>
-          <p:nvPr/>
-        </p:nvSpPr>
-        <p:spPr>
-          <a:xfrm>
-            <a:off x="7447747" y="1406318"/>
-            <a:ext cx="2582073" cy="830997"/>
-          </a:xfrm>
-          <a:prstGeom prst="rect">
-            <a:avLst/>
-          </a:prstGeom>
-          <a:noFill/>
-          <a:ln w="19050">
-            <a:solidFill>
-              <a:srgbClr val="FF0000"/>
-            </a:solidFill>
-            <a:prstDash val="sysDash"/>
-          </a:ln>
-        </p:spPr>
-        <p:txBody>
-          <a:bodyPr wrap="square" rtlCol="0">
-            <a:spAutoFit/>
-          </a:bodyPr>
-          <a:lstStyle/>
-          <a:p>
-            <a:r>
-              <a:rPr lang="en-US" sz="1200" b="1" dirty="0"/>
-              <a:t>Provide The MQTT Client connection interface lib to subscribe the data from the broker server</a:t>
-            </a:r>
-            <a:endParaRPr lang="en-SG" sz="1200" b="1" dirty="0"/>
-          </a:p>
-        </p:txBody>
-      </p:sp>
-      <p:cxnSp>
-        <p:nvCxnSpPr>
-          <p:cNvPr id="122" name="Connector: Elbow 121">
-            <a:extLst>
-              <a:ext uri="{FF2B5EF4-FFF2-40B4-BE49-F238E27FC236}">
-                <a16:creationId xmlns:a16="http://schemas.microsoft.com/office/drawing/2014/main" id="{DE2AB975-86C3-2B7C-54C1-542288DBAB6F}"/>
-              </a:ext>
-            </a:extLst>
-          </p:cNvPr>
-          <p:cNvCxnSpPr>
-            <a:cxnSpLocks/>
-            <a:stCxn id="117" idx="1"/>
-            <a:endCxn id="57" idx="3"/>
-          </p:cNvCxnSpPr>
-          <p:nvPr/>
-        </p:nvCxnSpPr>
-        <p:spPr>
-          <a:xfrm rot="10800000" flipV="1">
-            <a:off x="6591155" y="1821817"/>
-            <a:ext cx="856593" cy="889014"/>
-          </a:xfrm>
-          <a:prstGeom prst="bentConnector3">
-            <a:avLst>
-              <a:gd name="adj1" fmla="val 50000"/>
-            </a:avLst>
-          </a:prstGeom>
-          <a:ln>
-            <a:solidFill>
-              <a:srgbClr val="FF0000"/>
-            </a:solidFill>
-            <a:tailEnd type="triangle"/>
-          </a:ln>
-        </p:spPr>
-        <p:style>
-          <a:lnRef idx="2">
-            <a:schemeClr val="accent1"/>
-          </a:lnRef>
-          <a:fillRef idx="0">
-            <a:schemeClr val="accent1"/>
-          </a:fillRef>
-          <a:effectRef idx="1">
-            <a:schemeClr val="accent1"/>
-          </a:effectRef>
-          <a:fontRef idx="minor">
-            <a:schemeClr val="tx1"/>
-          </a:fontRef>
-        </p:style>
-      </p:cxnSp>
-      <p:cxnSp>
-        <p:nvCxnSpPr>
-          <p:cNvPr id="132" name="Straight Arrow Connector 131">
-            <a:extLst>
-              <a:ext uri="{FF2B5EF4-FFF2-40B4-BE49-F238E27FC236}">
-                <a16:creationId xmlns:a16="http://schemas.microsoft.com/office/drawing/2014/main" id="{802DB019-A146-1A4B-4854-57629F991AAD}"/>
-              </a:ext>
-            </a:extLst>
-          </p:cNvPr>
-          <p:cNvCxnSpPr>
-            <a:cxnSpLocks/>
-          </p:cNvCxnSpPr>
-          <p:nvPr/>
-        </p:nvCxnSpPr>
-        <p:spPr>
-          <a:xfrm flipH="1">
-            <a:off x="7042448" y="1716347"/>
-            <a:ext cx="417292" cy="0"/>
-          </a:xfrm>
-          <a:prstGeom prst="straightConnector1">
-            <a:avLst/>
-          </a:prstGeom>
-          <a:ln>
-            <a:solidFill>
-              <a:srgbClr val="FF0000"/>
-            </a:solidFill>
-            <a:tailEnd type="triangle"/>
-          </a:ln>
-        </p:spPr>
-        <p:style>
-          <a:lnRef idx="2">
-            <a:schemeClr val="accent1"/>
-          </a:lnRef>
-          <a:fillRef idx="0">
-            <a:schemeClr val="accent1"/>
-          </a:fillRef>
-          <a:effectRef idx="1">
-            <a:schemeClr val="accent1"/>
-          </a:effectRef>
-          <a:fontRef idx="minor">
-            <a:schemeClr val="tx1"/>
-          </a:fontRef>
-        </p:style>
-      </p:cxnSp>
-      <p:cxnSp>
-        <p:nvCxnSpPr>
-          <p:cNvPr id="134" name="Straight Arrow Connector 133">
-            <a:extLst>
-              <a:ext uri="{FF2B5EF4-FFF2-40B4-BE49-F238E27FC236}">
-                <a16:creationId xmlns:a16="http://schemas.microsoft.com/office/drawing/2014/main" id="{D2558A6D-7D2D-10D8-0FFF-801D6B589E13}"/>
-              </a:ext>
-            </a:extLst>
-          </p:cNvPr>
-          <p:cNvCxnSpPr>
-            <a:cxnSpLocks/>
-          </p:cNvCxnSpPr>
-          <p:nvPr/>
-        </p:nvCxnSpPr>
-        <p:spPr>
-          <a:xfrm flipH="1" flipV="1">
-            <a:off x="3547453" y="2835633"/>
-            <a:ext cx="3821936" cy="248445"/>
-          </a:xfrm>
-          <a:prstGeom prst="straightConnector1">
-            <a:avLst/>
-          </a:prstGeom>
-          <a:ln>
-            <a:solidFill>
-              <a:srgbClr val="FF0000"/>
-            </a:solidFill>
-            <a:tailEnd type="triangle"/>
-          </a:ln>
-        </p:spPr>
-        <p:style>
-          <a:lnRef idx="2">
-            <a:schemeClr val="accent1"/>
-          </a:lnRef>
-          <a:fillRef idx="0">
-            <a:schemeClr val="accent1"/>
-          </a:fillRef>
-          <a:effectRef idx="1">
-            <a:schemeClr val="accent1"/>
-          </a:effectRef>
-          <a:fontRef idx="minor">
-            <a:schemeClr val="tx1"/>
-          </a:fontRef>
-        </p:style>
-      </p:cxnSp>
-      <p:sp>
-        <p:nvSpPr>
-          <p:cNvPr id="138" name="TextBox 137">
-            <a:extLst>
-              <a:ext uri="{FF2B5EF4-FFF2-40B4-BE49-F238E27FC236}">
-                <a16:creationId xmlns:a16="http://schemas.microsoft.com/office/drawing/2014/main" id="{1B9340DC-E70B-E0E9-7AAD-CA28DAB1BBDA}"/>
-              </a:ext>
-            </a:extLst>
-          </p:cNvPr>
-          <p:cNvSpPr txBox="1"/>
-          <p:nvPr/>
-        </p:nvSpPr>
-        <p:spPr>
-          <a:xfrm>
-            <a:off x="7369389" y="2517921"/>
-            <a:ext cx="2660435" cy="830997"/>
-          </a:xfrm>
-          <a:prstGeom prst="rect">
-            <a:avLst/>
-          </a:prstGeom>
-          <a:noFill/>
-          <a:ln w="19050">
-            <a:solidFill>
-              <a:srgbClr val="FF0000"/>
-            </a:solidFill>
-            <a:prstDash val="sysDash"/>
-          </a:ln>
-        </p:spPr>
-        <p:txBody>
-          <a:bodyPr wrap="square" rtlCol="0">
-            <a:spAutoFit/>
-          </a:bodyPr>
-          <a:lstStyle/>
-          <a:p>
-            <a:r>
-              <a:rPr lang="en-US" sz="1200" b="1" dirty="0"/>
-              <a:t>Provide The MQTT Broker interface lib to save the data execution the control logic and handle all the data publish and subscribe request</a:t>
-            </a:r>
-            <a:endParaRPr lang="en-SG" sz="1200" b="1" dirty="0"/>
-          </a:p>
-        </p:txBody>
-      </p:sp>
-      <p:sp>
-        <p:nvSpPr>
-          <p:cNvPr id="139" name="TextBox 138">
-            <a:extLst>
-              <a:ext uri="{FF2B5EF4-FFF2-40B4-BE49-F238E27FC236}">
-                <a16:creationId xmlns:a16="http://schemas.microsoft.com/office/drawing/2014/main" id="{B8538CD5-1E8F-CBEA-B39C-63746835BAA1}"/>
-              </a:ext>
-            </a:extLst>
-          </p:cNvPr>
-          <p:cNvSpPr txBox="1"/>
-          <p:nvPr/>
-        </p:nvSpPr>
-        <p:spPr>
-          <a:xfrm>
-            <a:off x="1398824" y="790295"/>
-            <a:ext cx="8906580" cy="338554"/>
-          </a:xfrm>
-          <a:prstGeom prst="rect">
-            <a:avLst/>
-          </a:prstGeom>
-          <a:noFill/>
-        </p:spPr>
-        <p:txBody>
-          <a:bodyPr wrap="square" rtlCol="0">
-            <a:spAutoFit/>
-          </a:bodyPr>
-          <a:lstStyle/>
-          <a:p>
-            <a:r>
-              <a:rPr lang="en-US" sz="1600" b="1" dirty="0"/>
-              <a:t>Different OT levels DNP3 data follow with device configuration  </a:t>
-            </a:r>
+              <a:rPr lang="en-US" sz="2400" b="1" dirty="0"/>
+              <a:t>Python Virtual RTU Simulator With IEEE 1815-2021 DNP3.0 Comm Protocol</a:t>
+            </a:r>
+            <a:endParaRPr lang="en-SG" sz="2400" b="1" dirty="0"/>
           </a:p>
         </p:txBody>
       </p:sp>
     </p:spTree>
     <p:extLst>
       <p:ext uri="{BB962C8B-B14F-4D97-AF65-F5344CB8AC3E}">
-        <p14:creationId xmlns:p14="http://schemas.microsoft.com/office/powerpoint/2010/main" val="3696190865"/>
+        <p14:creationId xmlns:p14="http://schemas.microsoft.com/office/powerpoint/2010/main" val="1693198638"/>
       </p:ext>
     </p:extLst>
   </p:cSld>
@@ -5707,216 +5697,12 @@
           <a:chExt cx="0" cy="0"/>
         </a:xfrm>
       </p:grpSpPr>
-      <p:sp>
-        <p:nvSpPr>
-          <p:cNvPr id="66" name="Rectangle 65">
-            <a:extLst>
-              <a:ext uri="{FF2B5EF4-FFF2-40B4-BE49-F238E27FC236}">
-                <a16:creationId xmlns:a16="http://schemas.microsoft.com/office/drawing/2014/main" id="{837A8677-8040-C491-6D80-73149652E6CE}"/>
-              </a:ext>
-            </a:extLst>
-          </p:cNvPr>
-          <p:cNvSpPr/>
-          <p:nvPr/>
-        </p:nvSpPr>
-        <p:spPr>
-          <a:xfrm>
-            <a:off x="4543840" y="2145434"/>
-            <a:ext cx="2489871" cy="2995813"/>
-          </a:xfrm>
-          <a:prstGeom prst="rect">
-            <a:avLst/>
-          </a:prstGeom>
-          <a:solidFill>
-            <a:schemeClr val="accent6">
-              <a:lumMod val="20000"/>
-              <a:lumOff val="80000"/>
-            </a:schemeClr>
-          </a:solidFill>
-        </p:spPr>
-        <p:style>
-          <a:lnRef idx="2">
-            <a:schemeClr val="accent1">
-              <a:shade val="15000"/>
-            </a:schemeClr>
-          </a:lnRef>
-          <a:fillRef idx="1">
-            <a:schemeClr val="accent1"/>
-          </a:fillRef>
-          <a:effectRef idx="0">
-            <a:schemeClr val="accent1"/>
-          </a:effectRef>
-          <a:fontRef idx="minor">
-            <a:schemeClr val="lt1"/>
-          </a:fontRef>
-        </p:style>
-        <p:txBody>
-          <a:bodyPr rtlCol="0" anchor="ctr"/>
-          <a:lstStyle/>
-          <a:p>
-            <a:pPr algn="ctr"/>
-            <a:endParaRPr lang="en-SG" dirty="0"/>
-          </a:p>
-        </p:txBody>
-      </p:sp>
-      <p:sp>
-        <p:nvSpPr>
-          <p:cNvPr id="4" name="Rectangle 3">
-            <a:extLst>
-              <a:ext uri="{FF2B5EF4-FFF2-40B4-BE49-F238E27FC236}">
-                <a16:creationId xmlns:a16="http://schemas.microsoft.com/office/drawing/2014/main" id="{ED7DD3D4-6B5E-7CB5-E003-2C037546352E}"/>
-              </a:ext>
-            </a:extLst>
-          </p:cNvPr>
-          <p:cNvSpPr/>
-          <p:nvPr/>
-        </p:nvSpPr>
-        <p:spPr>
-          <a:xfrm>
-            <a:off x="548582" y="2144789"/>
-            <a:ext cx="3413179" cy="4239664"/>
-          </a:xfrm>
-          <a:prstGeom prst="rect">
-            <a:avLst/>
-          </a:prstGeom>
-          <a:solidFill>
-            <a:schemeClr val="accent1">
-              <a:lumMod val="20000"/>
-              <a:lumOff val="80000"/>
-            </a:schemeClr>
-          </a:solidFill>
-        </p:spPr>
-        <p:style>
-          <a:lnRef idx="2">
-            <a:schemeClr val="accent1">
-              <a:shade val="15000"/>
-            </a:schemeClr>
-          </a:lnRef>
-          <a:fillRef idx="1">
-            <a:schemeClr val="accent1"/>
-          </a:fillRef>
-          <a:effectRef idx="0">
-            <a:schemeClr val="accent1"/>
-          </a:effectRef>
-          <a:fontRef idx="minor">
-            <a:schemeClr val="lt1"/>
-          </a:fontRef>
-        </p:style>
-        <p:txBody>
-          <a:bodyPr rtlCol="0" anchor="ctr"/>
-          <a:lstStyle/>
-          <a:p>
-            <a:pPr algn="ctr"/>
-            <a:endParaRPr lang="en-SG" dirty="0"/>
-          </a:p>
-        </p:txBody>
-      </p:sp>
-      <p:sp>
-        <p:nvSpPr>
-          <p:cNvPr id="68" name="TextBox 67">
-            <a:extLst>
-              <a:ext uri="{FF2B5EF4-FFF2-40B4-BE49-F238E27FC236}">
-                <a16:creationId xmlns:a16="http://schemas.microsoft.com/office/drawing/2014/main" id="{785B9271-91E4-96A0-FFD7-67E7E3B97AB1}"/>
-              </a:ext>
-            </a:extLst>
-          </p:cNvPr>
-          <p:cNvSpPr txBox="1"/>
-          <p:nvPr/>
-        </p:nvSpPr>
-        <p:spPr>
-          <a:xfrm>
-            <a:off x="4479495" y="1786827"/>
-            <a:ext cx="2884604" cy="307777"/>
-          </a:xfrm>
-          <a:prstGeom prst="rect">
-            <a:avLst/>
-          </a:prstGeom>
-          <a:noFill/>
-        </p:spPr>
-        <p:txBody>
-          <a:bodyPr wrap="square" rtlCol="0">
-            <a:spAutoFit/>
-          </a:bodyPr>
-          <a:lstStyle/>
-          <a:p>
-            <a:r>
-              <a:rPr lang="en-US" sz="1400" b="1" dirty="0"/>
-              <a:t>Level1 OT Controller Devices </a:t>
-            </a:r>
-            <a:endParaRPr lang="en-SG" sz="1400" b="1" dirty="0"/>
-          </a:p>
-        </p:txBody>
-      </p:sp>
-      <p:sp>
-        <p:nvSpPr>
-          <p:cNvPr id="80" name="Rectangle 79">
-            <a:extLst>
-              <a:ext uri="{FF2B5EF4-FFF2-40B4-BE49-F238E27FC236}">
-                <a16:creationId xmlns:a16="http://schemas.microsoft.com/office/drawing/2014/main" id="{410193F1-FCF7-0996-4AFD-5FEB7922A1DC}"/>
-              </a:ext>
-            </a:extLst>
-          </p:cNvPr>
-          <p:cNvSpPr/>
-          <p:nvPr/>
-        </p:nvSpPr>
-        <p:spPr>
-          <a:xfrm>
-            <a:off x="5219105" y="3018211"/>
-            <a:ext cx="1494965" cy="295727"/>
-          </a:xfrm>
-          <a:prstGeom prst="rect">
-            <a:avLst/>
-          </a:prstGeom>
-          <a:solidFill>
-            <a:schemeClr val="accent6">
-              <a:lumMod val="75000"/>
-            </a:schemeClr>
-          </a:solidFill>
-          <a:ln>
-            <a:solidFill>
-              <a:schemeClr val="tx1"/>
-            </a:solidFill>
-          </a:ln>
-        </p:spPr>
-        <p:style>
-          <a:lnRef idx="2">
-            <a:schemeClr val="accent1">
-              <a:shade val="50000"/>
-            </a:schemeClr>
-          </a:lnRef>
-          <a:fillRef idx="1">
-            <a:schemeClr val="accent1"/>
-          </a:fillRef>
-          <a:effectRef idx="0">
-            <a:schemeClr val="accent1"/>
-          </a:effectRef>
-          <a:fontRef idx="minor">
-            <a:schemeClr val="lt1"/>
-          </a:fontRef>
-        </p:style>
-        <p:txBody>
-          <a:bodyPr rtlCol="0" anchor="ctr"/>
-          <a:lstStyle/>
-          <a:p>
-            <a:pPr algn="ctr"/>
-            <a:r>
-              <a:rPr lang="en-US" sz="1050" b="1" dirty="0"/>
-              <a:t>Input Parameter </a:t>
-            </a:r>
-            <a:r>
-              <a:rPr lang="en-US" sz="1050" b="1" dirty="0" err="1"/>
-              <a:t>Dict</a:t>
-            </a:r>
-            <a:endParaRPr lang="en-SG" sz="1050" b="1" dirty="0"/>
-          </a:p>
-        </p:txBody>
-      </p:sp>
       <p:pic>
         <p:nvPicPr>
-          <p:cNvPr id="82" name="Picture 81">
-            <a:extLst>
-              <a:ext uri="{FF2B5EF4-FFF2-40B4-BE49-F238E27FC236}">
-                <a16:creationId xmlns:a16="http://schemas.microsoft.com/office/drawing/2014/main" id="{0C4944A4-AC6E-C358-AD9C-F8CDE9B6C9A5}"/>
+          <p:cNvPr id="5" name="Picture 4">
+            <a:extLst>
+              <a:ext uri="{FF2B5EF4-FFF2-40B4-BE49-F238E27FC236}">
+                <a16:creationId xmlns:a16="http://schemas.microsoft.com/office/drawing/2014/main" id="{2DD99C46-2AA2-1B01-CE9C-3076A9FCC005}"/>
               </a:ext>
             </a:extLst>
           </p:cNvPr>
@@ -5926,74 +5712,33 @@
           <p:nvPr/>
         </p:nvPicPr>
         <p:blipFill>
-          <a:blip r:embed="rId3"/>
+          <a:blip r:embed="rId2">
+            <a:extLst>
+              <a:ext uri="{28A0092B-C50C-407E-A947-70E740481C1C}">
+                <a14:useLocalDpi xmlns:a14="http://schemas.microsoft.com/office/drawing/2010/main" val="0"/>
+              </a:ext>
+            </a:extLst>
+          </a:blip>
           <a:stretch>
             <a:fillRect/>
           </a:stretch>
         </p:blipFill>
         <p:spPr>
           <a:xfrm>
-            <a:off x="5415143" y="3599698"/>
-            <a:ext cx="762864" cy="663898"/>
+            <a:off x="452972" y="1394505"/>
+            <a:ext cx="11286049" cy="4943289"/>
           </a:xfrm>
           <a:prstGeom prst="rect">
             <a:avLst/>
           </a:prstGeom>
-          <a:ln w="19050">
-            <a:solidFill>
-              <a:schemeClr val="tx1"/>
-            </a:solidFill>
-          </a:ln>
         </p:spPr>
       </p:pic>
-      <p:cxnSp>
-        <p:nvCxnSpPr>
-          <p:cNvPr id="84" name="Straight Arrow Connector 83">
-            <a:extLst>
-              <a:ext uri="{FF2B5EF4-FFF2-40B4-BE49-F238E27FC236}">
-                <a16:creationId xmlns:a16="http://schemas.microsoft.com/office/drawing/2014/main" id="{4D271E74-DEAC-DBC5-E155-98AC307DE59C}"/>
-              </a:ext>
-            </a:extLst>
-          </p:cNvPr>
-          <p:cNvCxnSpPr>
-            <a:cxnSpLocks/>
-          </p:cNvCxnSpPr>
-          <p:nvPr/>
-        </p:nvCxnSpPr>
-        <p:spPr>
-          <a:xfrm>
-            <a:off x="5796575" y="3305723"/>
-            <a:ext cx="0" cy="245081"/>
-          </a:xfrm>
-          <a:prstGeom prst="straightConnector1">
-            <a:avLst/>
-          </a:prstGeom>
-          <a:ln>
-            <a:prstDash val="sysDash"/>
-            <a:tailEnd type="triangle"/>
-          </a:ln>
-        </p:spPr>
-        <p:style>
-          <a:lnRef idx="2">
-            <a:schemeClr val="dk1"/>
-          </a:lnRef>
-          <a:fillRef idx="0">
-            <a:schemeClr val="dk1"/>
-          </a:fillRef>
-          <a:effectRef idx="1">
-            <a:schemeClr val="dk1"/>
-          </a:effectRef>
-          <a:fontRef idx="minor">
-            <a:schemeClr val="tx1"/>
-          </a:fontRef>
-        </p:style>
-      </p:cxnSp>
-      <p:sp>
-        <p:nvSpPr>
-          <p:cNvPr id="125" name="TextBox 124">
-            <a:extLst>
-              <a:ext uri="{FF2B5EF4-FFF2-40B4-BE49-F238E27FC236}">
-                <a16:creationId xmlns:a16="http://schemas.microsoft.com/office/drawing/2014/main" id="{587F13EF-BB40-8784-CA1E-3F7F9B4EDF0E}"/>
+      <p:sp>
+        <p:nvSpPr>
+          <p:cNvPr id="11" name="TextBox 10">
+            <a:extLst>
+              <a:ext uri="{FF2B5EF4-FFF2-40B4-BE49-F238E27FC236}">
+                <a16:creationId xmlns:a16="http://schemas.microsoft.com/office/drawing/2014/main" id="{1C24A107-80BB-DE3D-B7F5-EC49B9D6F5C8}"/>
               </a:ext>
             </a:extLst>
           </p:cNvPr>
@@ -6002,625 +5747,14 @@
         </p:nvSpPr>
         <p:spPr>
           <a:xfrm>
-            <a:off x="527544" y="1766471"/>
-            <a:ext cx="3211175" cy="307777"/>
+            <a:off x="452972" y="649297"/>
+            <a:ext cx="11286049" cy="461665"/>
           </a:xfrm>
           <a:prstGeom prst="rect">
             <a:avLst/>
           </a:prstGeom>
           <a:noFill/>
-        </p:spPr>
-        <p:txBody>
-          <a:bodyPr wrap="square" rtlCol="0">
-            <a:spAutoFit/>
-          </a:bodyPr>
-          <a:lstStyle/>
-          <a:p>
-            <a:r>
-              <a:rPr lang="en-US" sz="1400" b="1" dirty="0"/>
-              <a:t>Level0 OT Physical Field I/O Devices </a:t>
-            </a:r>
-            <a:endParaRPr lang="en-SG" sz="1400" b="1" dirty="0"/>
-          </a:p>
-        </p:txBody>
-      </p:sp>
-      <p:sp>
-        <p:nvSpPr>
-          <p:cNvPr id="148" name="TextBox 147">
-            <a:extLst>
-              <a:ext uri="{FF2B5EF4-FFF2-40B4-BE49-F238E27FC236}">
-                <a16:creationId xmlns:a16="http://schemas.microsoft.com/office/drawing/2014/main" id="{C0089D7C-7E8D-AD1C-D162-A3C3BE67C8FF}"/>
-              </a:ext>
-            </a:extLst>
-          </p:cNvPr>
-          <p:cNvSpPr txBox="1"/>
-          <p:nvPr/>
-        </p:nvSpPr>
-        <p:spPr>
-          <a:xfrm>
-            <a:off x="4733726" y="3578384"/>
-            <a:ext cx="875441" cy="646331"/>
-          </a:xfrm>
-          <a:prstGeom prst="rect">
-            <a:avLst/>
-          </a:prstGeom>
-          <a:noFill/>
-        </p:spPr>
-        <p:txBody>
-          <a:bodyPr wrap="square" rtlCol="0">
-            <a:spAutoFit/>
-          </a:bodyPr>
-          <a:lstStyle/>
-          <a:p>
-            <a:r>
-              <a:rPr lang="en-US" sz="1200" b="1" dirty="0"/>
-              <a:t>Auto</a:t>
-            </a:r>
-          </a:p>
-          <a:p>
-            <a:r>
-              <a:rPr lang="en-US" sz="1200" b="1" dirty="0"/>
-              <a:t>Control </a:t>
-            </a:r>
-          </a:p>
-          <a:p>
-            <a:r>
-              <a:rPr lang="en-US" sz="1200" b="1" dirty="0"/>
-              <a:t>Logic</a:t>
-            </a:r>
-            <a:endParaRPr lang="en-SG" sz="1200" b="1" dirty="0"/>
-          </a:p>
-        </p:txBody>
-      </p:sp>
-      <p:sp>
-        <p:nvSpPr>
-          <p:cNvPr id="161" name="Rectangle 160">
-            <a:extLst>
-              <a:ext uri="{FF2B5EF4-FFF2-40B4-BE49-F238E27FC236}">
-                <a16:creationId xmlns:a16="http://schemas.microsoft.com/office/drawing/2014/main" id="{32ADACBF-6CD1-7C6A-393E-8FDE39B7951F}"/>
-              </a:ext>
-            </a:extLst>
-          </p:cNvPr>
-          <p:cNvSpPr/>
-          <p:nvPr/>
-        </p:nvSpPr>
-        <p:spPr>
-          <a:xfrm>
-            <a:off x="8011053" y="2144789"/>
-            <a:ext cx="3413180" cy="4219578"/>
-          </a:xfrm>
-          <a:prstGeom prst="rect">
-            <a:avLst/>
-          </a:prstGeom>
-          <a:solidFill>
-            <a:schemeClr val="accent2">
-              <a:lumMod val="20000"/>
-              <a:lumOff val="80000"/>
-            </a:schemeClr>
-          </a:solidFill>
-        </p:spPr>
-        <p:style>
-          <a:lnRef idx="2">
-            <a:schemeClr val="accent1">
-              <a:shade val="15000"/>
-            </a:schemeClr>
-          </a:lnRef>
-          <a:fillRef idx="1">
-            <a:schemeClr val="accent1"/>
-          </a:fillRef>
-          <a:effectRef idx="0">
-            <a:schemeClr val="accent1"/>
-          </a:effectRef>
-          <a:fontRef idx="minor">
-            <a:schemeClr val="lt1"/>
-          </a:fontRef>
-        </p:style>
-        <p:txBody>
-          <a:bodyPr rtlCol="0" anchor="ctr"/>
-          <a:lstStyle/>
-          <a:p>
-            <a:pPr algn="ctr"/>
-            <a:endParaRPr lang="en-SG" dirty="0"/>
-          </a:p>
-        </p:txBody>
-      </p:sp>
-      <p:sp>
-        <p:nvSpPr>
-          <p:cNvPr id="162" name="TextBox 161">
-            <a:extLst>
-              <a:ext uri="{FF2B5EF4-FFF2-40B4-BE49-F238E27FC236}">
-                <a16:creationId xmlns:a16="http://schemas.microsoft.com/office/drawing/2014/main" id="{5089A106-CF1F-EBEA-140F-03132C4ED2DD}"/>
-              </a:ext>
-            </a:extLst>
-          </p:cNvPr>
-          <p:cNvSpPr txBox="1"/>
-          <p:nvPr/>
-        </p:nvSpPr>
-        <p:spPr>
-          <a:xfrm>
-            <a:off x="7897351" y="1774329"/>
-            <a:ext cx="3211175" cy="307777"/>
-          </a:xfrm>
-          <a:prstGeom prst="rect">
-            <a:avLst/>
-          </a:prstGeom>
-          <a:noFill/>
-        </p:spPr>
-        <p:txBody>
-          <a:bodyPr wrap="square" rtlCol="0">
-            <a:spAutoFit/>
-          </a:bodyPr>
-          <a:lstStyle/>
-          <a:p>
-            <a:r>
-              <a:rPr lang="en-US" sz="1400" b="1" dirty="0"/>
-              <a:t>Level2 OT Control Console or HMI</a:t>
-            </a:r>
-            <a:endParaRPr lang="en-SG" sz="1400" b="1" dirty="0"/>
-          </a:p>
-        </p:txBody>
-      </p:sp>
-      <p:sp>
-        <p:nvSpPr>
-          <p:cNvPr id="83" name="Rectangle 82">
-            <a:extLst>
-              <a:ext uri="{FF2B5EF4-FFF2-40B4-BE49-F238E27FC236}">
-                <a16:creationId xmlns:a16="http://schemas.microsoft.com/office/drawing/2014/main" id="{A2733834-1F35-5EC2-2694-CCCF1592DCF7}"/>
-              </a:ext>
-            </a:extLst>
-          </p:cNvPr>
-          <p:cNvSpPr/>
-          <p:nvPr/>
-        </p:nvSpPr>
-        <p:spPr>
-          <a:xfrm>
-            <a:off x="5247599" y="4582055"/>
-            <a:ext cx="1573581" cy="295727"/>
-          </a:xfrm>
-          <a:prstGeom prst="rect">
-            <a:avLst/>
-          </a:prstGeom>
-          <a:solidFill>
-            <a:schemeClr val="accent6">
-              <a:lumMod val="75000"/>
-            </a:schemeClr>
-          </a:solidFill>
-          <a:ln>
-            <a:solidFill>
-              <a:schemeClr val="tx1"/>
-            </a:solidFill>
-          </a:ln>
-        </p:spPr>
-        <p:style>
-          <a:lnRef idx="2">
-            <a:schemeClr val="accent1">
-              <a:shade val="50000"/>
-            </a:schemeClr>
-          </a:lnRef>
-          <a:fillRef idx="1">
-            <a:schemeClr val="accent1"/>
-          </a:fillRef>
-          <a:effectRef idx="0">
-            <a:schemeClr val="accent1"/>
-          </a:effectRef>
-          <a:fontRef idx="minor">
-            <a:schemeClr val="lt1"/>
-          </a:fontRef>
-        </p:style>
-        <p:txBody>
-          <a:bodyPr rtlCol="0" anchor="ctr"/>
-          <a:lstStyle/>
-          <a:p>
-            <a:pPr algn="ctr"/>
-            <a:r>
-              <a:rPr lang="en-US" sz="1050" b="1" dirty="0"/>
-              <a:t>Output Parameter </a:t>
-            </a:r>
-            <a:r>
-              <a:rPr lang="en-US" sz="1050" b="1" dirty="0" err="1"/>
-              <a:t>Dict</a:t>
-            </a:r>
-            <a:endParaRPr lang="en-SG" sz="1050" b="1" dirty="0"/>
-          </a:p>
-        </p:txBody>
-      </p:sp>
-      <p:sp>
-        <p:nvSpPr>
-          <p:cNvPr id="32" name="Rectangle 31">
-            <a:extLst>
-              <a:ext uri="{FF2B5EF4-FFF2-40B4-BE49-F238E27FC236}">
-                <a16:creationId xmlns:a16="http://schemas.microsoft.com/office/drawing/2014/main" id="{7813263F-1648-5749-94E7-C1F6266E379E}"/>
-              </a:ext>
-            </a:extLst>
-          </p:cNvPr>
-          <p:cNvSpPr/>
-          <p:nvPr/>
-        </p:nvSpPr>
-        <p:spPr>
-          <a:xfrm>
-            <a:off x="3732213" y="2953594"/>
-            <a:ext cx="1183100" cy="559160"/>
-          </a:xfrm>
-          <a:prstGeom prst="rect">
-            <a:avLst/>
-          </a:prstGeom>
-          <a:solidFill>
-            <a:schemeClr val="accent2"/>
-          </a:solidFill>
-        </p:spPr>
-        <p:style>
-          <a:lnRef idx="2">
-            <a:schemeClr val="accent1">
-              <a:shade val="50000"/>
-            </a:schemeClr>
-          </a:lnRef>
-          <a:fillRef idx="1">
-            <a:schemeClr val="accent1"/>
-          </a:fillRef>
-          <a:effectRef idx="0">
-            <a:schemeClr val="accent1"/>
-          </a:effectRef>
-          <a:fontRef idx="minor">
-            <a:schemeClr val="lt1"/>
-          </a:fontRef>
-        </p:style>
-        <p:txBody>
-          <a:bodyPr rtlCol="0" anchor="ctr"/>
-          <a:lstStyle/>
-          <a:p>
-            <a:r>
-              <a:rPr lang="en-US" sz="1050" b="1" dirty="0"/>
-              <a:t>UDP Simulated  Electrical Signal RTU Input</a:t>
-            </a:r>
-            <a:endParaRPr lang="en-SG" sz="1050" b="1" dirty="0"/>
-          </a:p>
-        </p:txBody>
-      </p:sp>
-      <p:sp>
-        <p:nvSpPr>
-          <p:cNvPr id="35" name="Rectangle 34">
-            <a:extLst>
-              <a:ext uri="{FF2B5EF4-FFF2-40B4-BE49-F238E27FC236}">
-                <a16:creationId xmlns:a16="http://schemas.microsoft.com/office/drawing/2014/main" id="{6CE8F210-3F43-6E6B-8F0E-548004A1C5B5}"/>
-              </a:ext>
-            </a:extLst>
-          </p:cNvPr>
-          <p:cNvSpPr/>
-          <p:nvPr/>
-        </p:nvSpPr>
-        <p:spPr>
-          <a:xfrm>
-            <a:off x="3710639" y="4351785"/>
-            <a:ext cx="1183100" cy="559160"/>
-          </a:xfrm>
-          <a:prstGeom prst="rect">
-            <a:avLst/>
-          </a:prstGeom>
-          <a:solidFill>
-            <a:schemeClr val="accent2"/>
-          </a:solidFill>
-        </p:spPr>
-        <p:style>
-          <a:lnRef idx="2">
-            <a:schemeClr val="accent1">
-              <a:shade val="50000"/>
-            </a:schemeClr>
-          </a:lnRef>
-          <a:fillRef idx="1">
-            <a:schemeClr val="accent1"/>
-          </a:fillRef>
-          <a:effectRef idx="0">
-            <a:schemeClr val="accent1"/>
-          </a:effectRef>
-          <a:fontRef idx="minor">
-            <a:schemeClr val="lt1"/>
-          </a:fontRef>
-        </p:style>
-        <p:txBody>
-          <a:bodyPr rtlCol="0" anchor="ctr"/>
-          <a:lstStyle/>
-          <a:p>
-            <a:r>
-              <a:rPr lang="en-US" sz="1050" b="1" dirty="0"/>
-              <a:t>UDP Simulated  Electrical Signal RTU Output</a:t>
-            </a:r>
-            <a:endParaRPr lang="en-SG" sz="1050" b="1" dirty="0"/>
-          </a:p>
-        </p:txBody>
-      </p:sp>
-      <p:cxnSp>
-        <p:nvCxnSpPr>
-          <p:cNvPr id="65" name="Straight Arrow Connector 64">
-            <a:extLst>
-              <a:ext uri="{FF2B5EF4-FFF2-40B4-BE49-F238E27FC236}">
-                <a16:creationId xmlns:a16="http://schemas.microsoft.com/office/drawing/2014/main" id="{D81C8210-C0E7-B3E4-859C-1F4918518F21}"/>
-              </a:ext>
-            </a:extLst>
-          </p:cNvPr>
-          <p:cNvCxnSpPr>
-            <a:cxnSpLocks/>
-          </p:cNvCxnSpPr>
-          <p:nvPr/>
-        </p:nvCxnSpPr>
-        <p:spPr>
-          <a:xfrm>
-            <a:off x="5780178" y="4252750"/>
-            <a:ext cx="0" cy="329305"/>
-          </a:xfrm>
-          <a:prstGeom prst="straightConnector1">
-            <a:avLst/>
-          </a:prstGeom>
-          <a:ln>
-            <a:prstDash val="sysDash"/>
-            <a:tailEnd type="triangle"/>
-          </a:ln>
-        </p:spPr>
-        <p:style>
-          <a:lnRef idx="2">
-            <a:schemeClr val="dk1"/>
-          </a:lnRef>
-          <a:fillRef idx="0">
-            <a:schemeClr val="dk1"/>
-          </a:fillRef>
-          <a:effectRef idx="1">
-            <a:schemeClr val="dk1"/>
-          </a:effectRef>
-          <a:fontRef idx="minor">
-            <a:schemeClr val="tx1"/>
-          </a:fontRef>
-        </p:style>
-      </p:cxnSp>
-      <p:cxnSp>
-        <p:nvCxnSpPr>
-          <p:cNvPr id="72" name="Straight Arrow Connector 71">
-            <a:extLst>
-              <a:ext uri="{FF2B5EF4-FFF2-40B4-BE49-F238E27FC236}">
-                <a16:creationId xmlns:a16="http://schemas.microsoft.com/office/drawing/2014/main" id="{58B4CEA2-012D-1E0A-676D-15BF8BE1A4D0}"/>
-              </a:ext>
-            </a:extLst>
-          </p:cNvPr>
-          <p:cNvCxnSpPr>
-            <a:cxnSpLocks/>
-            <a:endCxn id="80" idx="1"/>
-          </p:cNvCxnSpPr>
-          <p:nvPr/>
-        </p:nvCxnSpPr>
-        <p:spPr>
-          <a:xfrm>
-            <a:off x="4915313" y="3154680"/>
-            <a:ext cx="303792" cy="0"/>
-          </a:xfrm>
-          <a:prstGeom prst="straightConnector1">
-            <a:avLst/>
-          </a:prstGeom>
-          <a:ln>
-            <a:prstDash val="sysDash"/>
-            <a:tailEnd type="triangle"/>
-          </a:ln>
-        </p:spPr>
-        <p:style>
-          <a:lnRef idx="2">
-            <a:schemeClr val="dk1"/>
-          </a:lnRef>
-          <a:fillRef idx="0">
-            <a:schemeClr val="dk1"/>
-          </a:fillRef>
-          <a:effectRef idx="1">
-            <a:schemeClr val="dk1"/>
-          </a:effectRef>
-          <a:fontRef idx="minor">
-            <a:schemeClr val="tx1"/>
-          </a:fontRef>
-        </p:style>
-      </p:cxnSp>
-      <p:cxnSp>
-        <p:nvCxnSpPr>
-          <p:cNvPr id="75" name="Straight Arrow Connector 74">
-            <a:extLst>
-              <a:ext uri="{FF2B5EF4-FFF2-40B4-BE49-F238E27FC236}">
-                <a16:creationId xmlns:a16="http://schemas.microsoft.com/office/drawing/2014/main" id="{6D4977DE-76D9-A860-79E2-C07C7F2576C6}"/>
-              </a:ext>
-            </a:extLst>
-          </p:cNvPr>
-          <p:cNvCxnSpPr>
-            <a:cxnSpLocks/>
-          </p:cNvCxnSpPr>
-          <p:nvPr/>
-        </p:nvCxnSpPr>
-        <p:spPr>
-          <a:xfrm flipH="1" flipV="1">
-            <a:off x="4872774" y="4708550"/>
-            <a:ext cx="353860" cy="0"/>
-          </a:xfrm>
-          <a:prstGeom prst="straightConnector1">
-            <a:avLst/>
-          </a:prstGeom>
-          <a:ln>
-            <a:prstDash val="sysDash"/>
-            <a:tailEnd type="triangle"/>
-          </a:ln>
-        </p:spPr>
-        <p:style>
-          <a:lnRef idx="2">
-            <a:schemeClr val="dk1"/>
-          </a:lnRef>
-          <a:fillRef idx="0">
-            <a:schemeClr val="dk1"/>
-          </a:fillRef>
-          <a:effectRef idx="1">
-            <a:schemeClr val="dk1"/>
-          </a:effectRef>
-          <a:fontRef idx="minor">
-            <a:schemeClr val="tx1"/>
-          </a:fontRef>
-        </p:style>
-      </p:cxnSp>
-      <p:sp>
-        <p:nvSpPr>
-          <p:cNvPr id="81" name="Rectangle 80">
-            <a:extLst>
-              <a:ext uri="{FF2B5EF4-FFF2-40B4-BE49-F238E27FC236}">
-                <a16:creationId xmlns:a16="http://schemas.microsoft.com/office/drawing/2014/main" id="{AEA0A740-926A-31A2-62D0-5B65F5211AC2}"/>
-              </a:ext>
-            </a:extLst>
-          </p:cNvPr>
-          <p:cNvSpPr/>
-          <p:nvPr/>
-        </p:nvSpPr>
-        <p:spPr>
-          <a:xfrm>
-            <a:off x="6509352" y="3581371"/>
-            <a:ext cx="965256" cy="340962"/>
-          </a:xfrm>
-          <a:prstGeom prst="rect">
-            <a:avLst/>
-          </a:prstGeom>
-          <a:solidFill>
-            <a:schemeClr val="accent2"/>
-          </a:solidFill>
-        </p:spPr>
-        <p:style>
-          <a:lnRef idx="2">
-            <a:schemeClr val="accent1">
-              <a:shade val="50000"/>
-            </a:schemeClr>
-          </a:lnRef>
-          <a:fillRef idx="1">
-            <a:schemeClr val="accent1"/>
-          </a:fillRef>
-          <a:effectRef idx="0">
-            <a:schemeClr val="accent1"/>
-          </a:effectRef>
-          <a:fontRef idx="minor">
-            <a:schemeClr val="lt1"/>
-          </a:fontRef>
-        </p:style>
-        <p:txBody>
-          <a:bodyPr rtlCol="0" anchor="ctr"/>
-          <a:lstStyle/>
-          <a:p>
-            <a:r>
-              <a:rPr lang="en-US" sz="1050" b="1" dirty="0"/>
-              <a:t>D</a:t>
-            </a:r>
-            <a:r>
-              <a:rPr lang="en-SG" sz="1050" b="1" dirty="0"/>
-              <a:t>NP3 Server</a:t>
-            </a:r>
-          </a:p>
-        </p:txBody>
-      </p:sp>
-      <p:cxnSp>
-        <p:nvCxnSpPr>
-          <p:cNvPr id="87" name="Straight Connector 86">
-            <a:extLst>
-              <a:ext uri="{FF2B5EF4-FFF2-40B4-BE49-F238E27FC236}">
-                <a16:creationId xmlns:a16="http://schemas.microsoft.com/office/drawing/2014/main" id="{525058C5-A339-2CFC-1C58-5CE6271AD8F4}"/>
-              </a:ext>
-            </a:extLst>
-          </p:cNvPr>
-          <p:cNvCxnSpPr>
-            <a:cxnSpLocks/>
-          </p:cNvCxnSpPr>
-          <p:nvPr/>
-        </p:nvCxnSpPr>
-        <p:spPr>
-          <a:xfrm>
-            <a:off x="6566585" y="3319702"/>
-            <a:ext cx="0" cy="258682"/>
-          </a:xfrm>
-          <a:prstGeom prst="line">
-            <a:avLst/>
-          </a:prstGeom>
-        </p:spPr>
-        <p:style>
-          <a:lnRef idx="2">
-            <a:schemeClr val="dk1"/>
-          </a:lnRef>
-          <a:fillRef idx="0">
-            <a:schemeClr val="dk1"/>
-          </a:fillRef>
-          <a:effectRef idx="1">
-            <a:schemeClr val="dk1"/>
-          </a:effectRef>
-          <a:fontRef idx="minor">
-            <a:schemeClr val="tx1"/>
-          </a:fontRef>
-        </p:style>
-      </p:cxnSp>
-      <p:sp>
-        <p:nvSpPr>
-          <p:cNvPr id="120" name="Rectangle 119">
-            <a:extLst>
-              <a:ext uri="{FF2B5EF4-FFF2-40B4-BE49-F238E27FC236}">
-                <a16:creationId xmlns:a16="http://schemas.microsoft.com/office/drawing/2014/main" id="{F00080B1-57FE-3EF4-943B-EFB50200C31E}"/>
-              </a:ext>
-            </a:extLst>
-          </p:cNvPr>
-          <p:cNvSpPr/>
-          <p:nvPr/>
-        </p:nvSpPr>
-        <p:spPr>
-          <a:xfrm>
-            <a:off x="6524779" y="4057946"/>
-            <a:ext cx="965256" cy="340962"/>
-          </a:xfrm>
-          <a:prstGeom prst="rect">
-            <a:avLst/>
-          </a:prstGeom>
-          <a:solidFill>
-            <a:schemeClr val="accent2"/>
-          </a:solidFill>
-        </p:spPr>
-        <p:style>
-          <a:lnRef idx="2">
-            <a:schemeClr val="accent1">
-              <a:shade val="50000"/>
-            </a:schemeClr>
-          </a:lnRef>
-          <a:fillRef idx="1">
-            <a:schemeClr val="accent1"/>
-          </a:fillRef>
-          <a:effectRef idx="0">
-            <a:schemeClr val="accent1"/>
-          </a:effectRef>
-          <a:fontRef idx="minor">
-            <a:schemeClr val="lt1"/>
-          </a:fontRef>
-        </p:style>
-        <p:txBody>
-          <a:bodyPr rtlCol="0" anchor="ctr"/>
-          <a:lstStyle/>
-          <a:p>
-            <a:r>
-              <a:rPr lang="en-SG" sz="1050" b="1" dirty="0"/>
-              <a:t>NDP3 Client</a:t>
-            </a:r>
-          </a:p>
-        </p:txBody>
-      </p:sp>
-      <p:sp>
-        <p:nvSpPr>
-          <p:cNvPr id="6" name="TextBox 5">
-            <a:extLst>
-              <a:ext uri="{FF2B5EF4-FFF2-40B4-BE49-F238E27FC236}">
-                <a16:creationId xmlns:a16="http://schemas.microsoft.com/office/drawing/2014/main" id="{4BCBE11D-52C4-DBF1-0423-DCE2EF202234}"/>
-              </a:ext>
-            </a:extLst>
-          </p:cNvPr>
-          <p:cNvSpPr txBox="1"/>
-          <p:nvPr/>
-        </p:nvSpPr>
-        <p:spPr>
-          <a:xfrm>
-            <a:off x="489416" y="735860"/>
-            <a:ext cx="10632433" cy="461665"/>
-          </a:xfrm>
-          <a:prstGeom prst="rect">
-            <a:avLst/>
-          </a:prstGeom>
-          <a:noFill/>
-          <a:ln w="19050">
+          <a:ln w="28575">
             <a:solidFill>
               <a:schemeClr val="tx1"/>
             </a:solidFill>
@@ -6635,972 +5769,16 @@
           <a:p>
             <a:r>
               <a:rPr lang="en-US" sz="2400" b="1" dirty="0"/>
-              <a:t> Python RTU/</a:t>
-            </a:r>
-            <a:r>
-              <a:rPr lang="en-US" sz="2400" b="1" dirty="0" err="1"/>
-              <a:t>IIoT</a:t>
-            </a:r>
-            <a:r>
-              <a:rPr lang="en-US" sz="2400" b="1" dirty="0"/>
-              <a:t> Simulator with IEC-20922 MQTT Communication Protocol</a:t>
+              <a:t>Python Virtual RTU Simulator With IEEE 1815-2021 DNP3.0 Comm Protocol</a:t>
             </a:r>
             <a:endParaRPr lang="en-SG" sz="2400" b="1" dirty="0"/>
           </a:p>
         </p:txBody>
       </p:sp>
-      <p:pic>
-        <p:nvPicPr>
-          <p:cNvPr id="7" name="Picture 6">
-            <a:extLst>
-              <a:ext uri="{FF2B5EF4-FFF2-40B4-BE49-F238E27FC236}">
-                <a16:creationId xmlns:a16="http://schemas.microsoft.com/office/drawing/2014/main" id="{801BD5C1-01FF-CA5A-DCA7-43CAEE762324}"/>
-              </a:ext>
-            </a:extLst>
-          </p:cNvPr>
-          <p:cNvPicPr>
-            <a:picLocks noChangeAspect="1"/>
-          </p:cNvPicPr>
-          <p:nvPr/>
-        </p:nvPicPr>
-        <p:blipFill>
-          <a:blip r:embed="rId4">
-            <a:extLst>
-              <a:ext uri="{28A0092B-C50C-407E-A947-70E740481C1C}">
-                <a14:useLocalDpi xmlns:a14="http://schemas.microsoft.com/office/drawing/2010/main" val="0"/>
-              </a:ext>
-            </a:extLst>
-          </a:blip>
-          <a:srcRect/>
-          <a:stretch>
-            <a:fillRect/>
-          </a:stretch>
-        </p:blipFill>
-        <p:spPr bwMode="auto">
-          <a:xfrm>
-            <a:off x="627240" y="2511144"/>
-            <a:ext cx="3015909" cy="1841400"/>
-          </a:xfrm>
-          <a:prstGeom prst="rect">
-            <a:avLst/>
-          </a:prstGeom>
-          <a:noFill/>
-          <a:ln w="19050">
-            <a:solidFill>
-              <a:schemeClr val="tx1"/>
-            </a:solidFill>
-          </a:ln>
-        </p:spPr>
-      </p:pic>
-      <p:pic>
-        <p:nvPicPr>
-          <p:cNvPr id="8" name="Picture 7">
-            <a:extLst>
-              <a:ext uri="{FF2B5EF4-FFF2-40B4-BE49-F238E27FC236}">
-                <a16:creationId xmlns:a16="http://schemas.microsoft.com/office/drawing/2014/main" id="{6477CF6C-F68F-DA56-04A7-492B6FEE3002}"/>
-              </a:ext>
-            </a:extLst>
-          </p:cNvPr>
-          <p:cNvPicPr>
-            <a:picLocks noChangeAspect="1"/>
-          </p:cNvPicPr>
-          <p:nvPr/>
-        </p:nvPicPr>
-        <p:blipFill>
-          <a:blip r:embed="rId5">
-            <a:extLst>
-              <a:ext uri="{28A0092B-C50C-407E-A947-70E740481C1C}">
-                <a14:useLocalDpi xmlns:a14="http://schemas.microsoft.com/office/drawing/2010/main" val="0"/>
-              </a:ext>
-            </a:extLst>
-          </a:blip>
-          <a:srcRect/>
-          <a:stretch>
-            <a:fillRect/>
-          </a:stretch>
-        </p:blipFill>
-        <p:spPr bwMode="auto">
-          <a:xfrm>
-            <a:off x="649266" y="4673267"/>
-            <a:ext cx="2982263" cy="1526799"/>
-          </a:xfrm>
-          <a:prstGeom prst="rect">
-            <a:avLst/>
-          </a:prstGeom>
-          <a:noFill/>
-          <a:ln w="19050">
-            <a:solidFill>
-              <a:schemeClr val="tx1"/>
-            </a:solidFill>
-          </a:ln>
-        </p:spPr>
-      </p:pic>
-      <p:sp>
-        <p:nvSpPr>
-          <p:cNvPr id="12" name="TextBox 11">
-            <a:extLst>
-              <a:ext uri="{FF2B5EF4-FFF2-40B4-BE49-F238E27FC236}">
-                <a16:creationId xmlns:a16="http://schemas.microsoft.com/office/drawing/2014/main" id="{2DCBA473-2400-C830-B1E3-9399BB15C164}"/>
-              </a:ext>
-            </a:extLst>
-          </p:cNvPr>
-          <p:cNvSpPr txBox="1"/>
-          <p:nvPr/>
-        </p:nvSpPr>
-        <p:spPr>
-          <a:xfrm>
-            <a:off x="527544" y="2182278"/>
-            <a:ext cx="3470111" cy="307777"/>
-          </a:xfrm>
-          <a:prstGeom prst="rect">
-            <a:avLst/>
-          </a:prstGeom>
-          <a:noFill/>
-        </p:spPr>
-        <p:txBody>
-          <a:bodyPr wrap="square" rtlCol="0">
-            <a:spAutoFit/>
-          </a:bodyPr>
-          <a:lstStyle/>
-          <a:p>
-            <a:r>
-              <a:rPr lang="en-SG" sz="1400" b="1" dirty="0">
-                <a:solidFill>
-                  <a:schemeClr val="tx2">
-                    <a:lumMod val="75000"/>
-                    <a:lumOff val="25000"/>
-                  </a:schemeClr>
-                </a:solidFill>
-              </a:rPr>
-              <a:t>Gas Power Generator Simulator Program </a:t>
-            </a:r>
-          </a:p>
-        </p:txBody>
-      </p:sp>
-      <p:sp>
-        <p:nvSpPr>
-          <p:cNvPr id="14" name="TextBox 13">
-            <a:extLst>
-              <a:ext uri="{FF2B5EF4-FFF2-40B4-BE49-F238E27FC236}">
-                <a16:creationId xmlns:a16="http://schemas.microsoft.com/office/drawing/2014/main" id="{B3BB6035-ECDD-E5CD-8792-25E6CC3C57B6}"/>
-              </a:ext>
-            </a:extLst>
-          </p:cNvPr>
-          <p:cNvSpPr txBox="1"/>
-          <p:nvPr/>
-        </p:nvSpPr>
-        <p:spPr>
-          <a:xfrm>
-            <a:off x="601142" y="4384208"/>
-            <a:ext cx="3470111" cy="307777"/>
-          </a:xfrm>
-          <a:prstGeom prst="rect">
-            <a:avLst/>
-          </a:prstGeom>
-          <a:noFill/>
-        </p:spPr>
-        <p:txBody>
-          <a:bodyPr wrap="square" rtlCol="0">
-            <a:spAutoFit/>
-          </a:bodyPr>
-          <a:lstStyle/>
-          <a:p>
-            <a:r>
-              <a:rPr lang="en-SG" sz="1400" b="1" dirty="0">
-                <a:solidFill>
-                  <a:schemeClr val="tx2">
-                    <a:lumMod val="75000"/>
-                    <a:lumOff val="25000"/>
-                  </a:schemeClr>
-                </a:solidFill>
-              </a:rPr>
-              <a:t>Transformer Simulator Program </a:t>
-            </a:r>
-          </a:p>
-        </p:txBody>
-      </p:sp>
-      <p:sp>
-        <p:nvSpPr>
-          <p:cNvPr id="18" name="Rectangle 17">
-            <a:extLst>
-              <a:ext uri="{FF2B5EF4-FFF2-40B4-BE49-F238E27FC236}">
-                <a16:creationId xmlns:a16="http://schemas.microsoft.com/office/drawing/2014/main" id="{8257B2BA-AB22-7164-ABAC-4C8AEB7A5B04}"/>
-              </a:ext>
-            </a:extLst>
-          </p:cNvPr>
-          <p:cNvSpPr/>
-          <p:nvPr/>
-        </p:nvSpPr>
-        <p:spPr>
-          <a:xfrm>
-            <a:off x="4502109" y="5440114"/>
-            <a:ext cx="2489871" cy="924253"/>
-          </a:xfrm>
-          <a:prstGeom prst="rect">
-            <a:avLst/>
-          </a:prstGeom>
-          <a:solidFill>
-            <a:schemeClr val="accent6">
-              <a:lumMod val="20000"/>
-              <a:lumOff val="80000"/>
-            </a:schemeClr>
-          </a:solidFill>
-        </p:spPr>
-        <p:style>
-          <a:lnRef idx="2">
-            <a:schemeClr val="accent1">
-              <a:shade val="15000"/>
-            </a:schemeClr>
-          </a:lnRef>
-          <a:fillRef idx="1">
-            <a:schemeClr val="accent1"/>
-          </a:fillRef>
-          <a:effectRef idx="0">
-            <a:schemeClr val="accent1"/>
-          </a:effectRef>
-          <a:fontRef idx="minor">
-            <a:schemeClr val="lt1"/>
-          </a:fontRef>
-        </p:style>
-        <p:txBody>
-          <a:bodyPr rtlCol="0" anchor="ctr"/>
-          <a:lstStyle/>
-          <a:p>
-            <a:pPr algn="ctr"/>
-            <a:endParaRPr lang="en-SG" dirty="0"/>
-          </a:p>
-        </p:txBody>
-      </p:sp>
-      <p:sp>
-        <p:nvSpPr>
-          <p:cNvPr id="22" name="Rectangle 21">
-            <a:extLst>
-              <a:ext uri="{FF2B5EF4-FFF2-40B4-BE49-F238E27FC236}">
-                <a16:creationId xmlns:a16="http://schemas.microsoft.com/office/drawing/2014/main" id="{BFED4AA2-6330-6FE4-282B-0FC75A6EF3D2}"/>
-              </a:ext>
-            </a:extLst>
-          </p:cNvPr>
-          <p:cNvSpPr/>
-          <p:nvPr/>
-        </p:nvSpPr>
-        <p:spPr>
-          <a:xfrm>
-            <a:off x="3710639" y="5734303"/>
-            <a:ext cx="1824158" cy="411596"/>
-          </a:xfrm>
-          <a:prstGeom prst="rect">
-            <a:avLst/>
-          </a:prstGeom>
-          <a:solidFill>
-            <a:schemeClr val="accent2"/>
-          </a:solidFill>
-        </p:spPr>
-        <p:style>
-          <a:lnRef idx="2">
-            <a:schemeClr val="accent1">
-              <a:shade val="50000"/>
-            </a:schemeClr>
-          </a:lnRef>
-          <a:fillRef idx="1">
-            <a:schemeClr val="accent1"/>
-          </a:fillRef>
-          <a:effectRef idx="0">
-            <a:schemeClr val="accent1"/>
-          </a:effectRef>
-          <a:fontRef idx="minor">
-            <a:schemeClr val="lt1"/>
-          </a:fontRef>
-        </p:style>
-        <p:txBody>
-          <a:bodyPr rtlCol="0" anchor="ctr"/>
-          <a:lstStyle/>
-          <a:p>
-            <a:r>
-              <a:rPr lang="en-US" sz="1050" b="1" dirty="0"/>
-              <a:t>UDP Simulated  Electrical Signal RTU Input</a:t>
-            </a:r>
-            <a:endParaRPr lang="en-SG" sz="1050" b="1" dirty="0"/>
-          </a:p>
-        </p:txBody>
-      </p:sp>
-      <p:sp>
-        <p:nvSpPr>
-          <p:cNvPr id="25" name="TextBox 24">
-            <a:extLst>
-              <a:ext uri="{FF2B5EF4-FFF2-40B4-BE49-F238E27FC236}">
-                <a16:creationId xmlns:a16="http://schemas.microsoft.com/office/drawing/2014/main" id="{B40E313C-6362-6892-CD05-00DB836BEE80}"/>
-              </a:ext>
-            </a:extLst>
-          </p:cNvPr>
-          <p:cNvSpPr txBox="1"/>
-          <p:nvPr/>
-        </p:nvSpPr>
-        <p:spPr>
-          <a:xfrm>
-            <a:off x="4483101" y="5449249"/>
-            <a:ext cx="2252131" cy="307777"/>
-          </a:xfrm>
-          <a:prstGeom prst="rect">
-            <a:avLst/>
-          </a:prstGeom>
-          <a:noFill/>
-        </p:spPr>
-        <p:txBody>
-          <a:bodyPr wrap="square" rtlCol="0">
-            <a:spAutoFit/>
-          </a:bodyPr>
-          <a:lstStyle/>
-          <a:p>
-            <a:r>
-              <a:rPr lang="en-US" sz="1400" b="1" dirty="0">
-                <a:solidFill>
-                  <a:schemeClr val="accent6">
-                    <a:lumMod val="50000"/>
-                  </a:schemeClr>
-                </a:solidFill>
-              </a:rPr>
-              <a:t>Metering Unit Simulation</a:t>
-            </a:r>
-            <a:endParaRPr lang="en-SG" sz="1400" b="1" dirty="0">
-              <a:solidFill>
-                <a:schemeClr val="accent6">
-                  <a:lumMod val="50000"/>
-                </a:schemeClr>
-              </a:solidFill>
-            </a:endParaRPr>
-          </a:p>
-        </p:txBody>
-      </p:sp>
-      <p:cxnSp>
-        <p:nvCxnSpPr>
-          <p:cNvPr id="27" name="Connector: Elbow 26">
-            <a:extLst>
-              <a:ext uri="{FF2B5EF4-FFF2-40B4-BE49-F238E27FC236}">
-                <a16:creationId xmlns:a16="http://schemas.microsoft.com/office/drawing/2014/main" id="{67D04D19-6C05-98C0-6ED5-C4A17572279F}"/>
-              </a:ext>
-            </a:extLst>
-          </p:cNvPr>
-          <p:cNvCxnSpPr>
-            <a:stCxn id="120" idx="1"/>
-          </p:cNvCxnSpPr>
-          <p:nvPr/>
-        </p:nvCxnSpPr>
-        <p:spPr>
-          <a:xfrm rot="10800000">
-            <a:off x="6336793" y="3313939"/>
-            <a:ext cx="187987" cy="914489"/>
-          </a:xfrm>
-          <a:prstGeom prst="bentConnector2">
-            <a:avLst/>
-          </a:prstGeom>
-        </p:spPr>
-        <p:style>
-          <a:lnRef idx="2">
-            <a:schemeClr val="dk1"/>
-          </a:lnRef>
-          <a:fillRef idx="0">
-            <a:schemeClr val="dk1"/>
-          </a:fillRef>
-          <a:effectRef idx="1">
-            <a:schemeClr val="dk1"/>
-          </a:effectRef>
-          <a:fontRef idx="minor">
-            <a:schemeClr val="tx1"/>
-          </a:fontRef>
-        </p:style>
-      </p:cxnSp>
-      <p:sp>
-        <p:nvSpPr>
-          <p:cNvPr id="29" name="Rectangle 28">
-            <a:extLst>
-              <a:ext uri="{FF2B5EF4-FFF2-40B4-BE49-F238E27FC236}">
-                <a16:creationId xmlns:a16="http://schemas.microsoft.com/office/drawing/2014/main" id="{736023D7-EADF-B320-6F9A-9DE5E13289D5}"/>
-              </a:ext>
-            </a:extLst>
-          </p:cNvPr>
-          <p:cNvSpPr/>
-          <p:nvPr/>
-        </p:nvSpPr>
-        <p:spPr>
-          <a:xfrm>
-            <a:off x="6509352" y="5757026"/>
-            <a:ext cx="965256" cy="340962"/>
-          </a:xfrm>
-          <a:prstGeom prst="rect">
-            <a:avLst/>
-          </a:prstGeom>
-          <a:solidFill>
-            <a:schemeClr val="accent2"/>
-          </a:solidFill>
-        </p:spPr>
-        <p:style>
-          <a:lnRef idx="2">
-            <a:schemeClr val="accent1">
-              <a:shade val="50000"/>
-            </a:schemeClr>
-          </a:lnRef>
-          <a:fillRef idx="1">
-            <a:schemeClr val="accent1"/>
-          </a:fillRef>
-          <a:effectRef idx="0">
-            <a:schemeClr val="accent1"/>
-          </a:effectRef>
-          <a:fontRef idx="minor">
-            <a:schemeClr val="lt1"/>
-          </a:fontRef>
-        </p:style>
-        <p:txBody>
-          <a:bodyPr rtlCol="0" anchor="ctr"/>
-          <a:lstStyle/>
-          <a:p>
-            <a:r>
-              <a:rPr lang="en-US" sz="1050" b="1" dirty="0"/>
-              <a:t>D</a:t>
-            </a:r>
-            <a:r>
-              <a:rPr lang="en-SG" sz="1050" b="1" dirty="0"/>
-              <a:t>NP3 Server</a:t>
-            </a:r>
-          </a:p>
-        </p:txBody>
-      </p:sp>
-      <p:cxnSp>
-        <p:nvCxnSpPr>
-          <p:cNvPr id="34" name="Straight Arrow Connector 33">
-            <a:extLst>
-              <a:ext uri="{FF2B5EF4-FFF2-40B4-BE49-F238E27FC236}">
-                <a16:creationId xmlns:a16="http://schemas.microsoft.com/office/drawing/2014/main" id="{2D95B3EA-695C-8683-7F6F-B6370DB68676}"/>
-              </a:ext>
-            </a:extLst>
-          </p:cNvPr>
-          <p:cNvCxnSpPr>
-            <a:cxnSpLocks/>
-            <a:endCxn id="29" idx="1"/>
-          </p:cNvCxnSpPr>
-          <p:nvPr/>
-        </p:nvCxnSpPr>
-        <p:spPr>
-          <a:xfrm flipV="1">
-            <a:off x="5534797" y="5927507"/>
-            <a:ext cx="974555" cy="0"/>
-          </a:xfrm>
-          <a:prstGeom prst="straightConnector1">
-            <a:avLst/>
-          </a:prstGeom>
-          <a:ln>
-            <a:prstDash val="sysDash"/>
-            <a:tailEnd type="triangle"/>
-          </a:ln>
-        </p:spPr>
-        <p:style>
-          <a:lnRef idx="2">
-            <a:schemeClr val="dk1"/>
-          </a:lnRef>
-          <a:fillRef idx="0">
-            <a:schemeClr val="dk1"/>
-          </a:fillRef>
-          <a:effectRef idx="1">
-            <a:schemeClr val="dk1"/>
-          </a:effectRef>
-          <a:fontRef idx="minor">
-            <a:schemeClr val="tx1"/>
-          </a:fontRef>
-        </p:style>
-      </p:cxnSp>
-      <p:sp>
-        <p:nvSpPr>
-          <p:cNvPr id="51" name="TextBox 50">
-            <a:extLst>
-              <a:ext uri="{FF2B5EF4-FFF2-40B4-BE49-F238E27FC236}">
-                <a16:creationId xmlns:a16="http://schemas.microsoft.com/office/drawing/2014/main" id="{AA8E2B13-9828-258F-29C5-514FB36C81FD}"/>
-              </a:ext>
-            </a:extLst>
-          </p:cNvPr>
-          <p:cNvSpPr txBox="1"/>
-          <p:nvPr/>
-        </p:nvSpPr>
-        <p:spPr>
-          <a:xfrm>
-            <a:off x="4555358" y="2208149"/>
-            <a:ext cx="2732878" cy="523220"/>
-          </a:xfrm>
-          <a:prstGeom prst="rect">
-            <a:avLst/>
-          </a:prstGeom>
-          <a:noFill/>
-        </p:spPr>
-        <p:txBody>
-          <a:bodyPr wrap="square" rtlCol="0">
-            <a:spAutoFit/>
-          </a:bodyPr>
-          <a:lstStyle/>
-          <a:p>
-            <a:r>
-              <a:rPr lang="en-US" sz="1400" b="1" dirty="0">
-                <a:solidFill>
-                  <a:schemeClr val="accent6">
-                    <a:lumMod val="50000"/>
-                  </a:schemeClr>
-                </a:solidFill>
-              </a:rPr>
-              <a:t>Power Transmission Control RTU Simulation Framework</a:t>
-            </a:r>
-            <a:endParaRPr lang="en-SG" sz="1400" b="1" dirty="0">
-              <a:solidFill>
-                <a:schemeClr val="accent6">
-                  <a:lumMod val="50000"/>
-                </a:schemeClr>
-              </a:solidFill>
-            </a:endParaRPr>
-          </a:p>
-        </p:txBody>
-      </p:sp>
-      <p:sp>
-        <p:nvSpPr>
-          <p:cNvPr id="67" name="TextBox 66">
-            <a:extLst>
-              <a:ext uri="{FF2B5EF4-FFF2-40B4-BE49-F238E27FC236}">
-                <a16:creationId xmlns:a16="http://schemas.microsoft.com/office/drawing/2014/main" id="{E83D0994-FFC7-B371-BE19-4F804F4F3BC3}"/>
-              </a:ext>
-            </a:extLst>
-          </p:cNvPr>
-          <p:cNvSpPr txBox="1"/>
-          <p:nvPr/>
-        </p:nvSpPr>
-        <p:spPr>
-          <a:xfrm>
-            <a:off x="8046946" y="2198305"/>
-            <a:ext cx="2815913" cy="307777"/>
-          </a:xfrm>
-          <a:prstGeom prst="rect">
-            <a:avLst/>
-          </a:prstGeom>
-          <a:noFill/>
-        </p:spPr>
-        <p:txBody>
-          <a:bodyPr wrap="square" rtlCol="0">
-            <a:spAutoFit/>
-          </a:bodyPr>
-          <a:lstStyle/>
-          <a:p>
-            <a:r>
-              <a:rPr lang="en-US" sz="1400" b="1" dirty="0">
-                <a:solidFill>
-                  <a:schemeClr val="accent2">
-                    <a:lumMod val="50000"/>
-                  </a:schemeClr>
-                </a:solidFill>
-              </a:rPr>
-              <a:t>Generator Control And Monitor</a:t>
-            </a:r>
-            <a:endParaRPr lang="en-SG" sz="1400" b="1" dirty="0">
-              <a:solidFill>
-                <a:schemeClr val="accent2">
-                  <a:lumMod val="50000"/>
-                </a:schemeClr>
-              </a:solidFill>
-            </a:endParaRPr>
-          </a:p>
-        </p:txBody>
-      </p:sp>
-      <p:pic>
-        <p:nvPicPr>
-          <p:cNvPr id="54" name="Picture 53">
-            <a:extLst>
-              <a:ext uri="{FF2B5EF4-FFF2-40B4-BE49-F238E27FC236}">
-                <a16:creationId xmlns:a16="http://schemas.microsoft.com/office/drawing/2014/main" id="{036153AB-458B-9850-0785-49A992BAFD68}"/>
-              </a:ext>
-            </a:extLst>
-          </p:cNvPr>
-          <p:cNvPicPr>
-            <a:picLocks noChangeAspect="1"/>
-          </p:cNvPicPr>
-          <p:nvPr/>
-        </p:nvPicPr>
-        <p:blipFill>
-          <a:blip r:embed="rId6">
-            <a:extLst>
-              <a:ext uri="{28A0092B-C50C-407E-A947-70E740481C1C}">
-                <a14:useLocalDpi xmlns:a14="http://schemas.microsoft.com/office/drawing/2010/main" val="0"/>
-              </a:ext>
-            </a:extLst>
-          </a:blip>
-          <a:srcRect/>
-          <a:stretch>
-            <a:fillRect/>
-          </a:stretch>
-        </p:blipFill>
-        <p:spPr bwMode="auto">
-          <a:xfrm>
-            <a:off x="8159539" y="2582620"/>
-            <a:ext cx="3162389" cy="1324908"/>
-          </a:xfrm>
-          <a:prstGeom prst="rect">
-            <a:avLst/>
-          </a:prstGeom>
-          <a:noFill/>
-          <a:ln>
-            <a:noFill/>
-          </a:ln>
-        </p:spPr>
-      </p:pic>
-      <p:pic>
-        <p:nvPicPr>
-          <p:cNvPr id="56" name="Picture 55">
-            <a:extLst>
-              <a:ext uri="{FF2B5EF4-FFF2-40B4-BE49-F238E27FC236}">
-                <a16:creationId xmlns:a16="http://schemas.microsoft.com/office/drawing/2014/main" id="{2B5051B4-EE9F-301E-398B-78D971AFA3F2}"/>
-              </a:ext>
-            </a:extLst>
-          </p:cNvPr>
-          <p:cNvPicPr>
-            <a:picLocks noChangeAspect="1"/>
-          </p:cNvPicPr>
-          <p:nvPr/>
-        </p:nvPicPr>
-        <p:blipFill>
-          <a:blip r:embed="rId7">
-            <a:extLst>
-              <a:ext uri="{28A0092B-C50C-407E-A947-70E740481C1C}">
-                <a14:useLocalDpi xmlns:a14="http://schemas.microsoft.com/office/drawing/2010/main" val="0"/>
-              </a:ext>
-            </a:extLst>
-          </a:blip>
-          <a:stretch>
-            <a:fillRect/>
-          </a:stretch>
-        </p:blipFill>
-        <p:spPr>
-          <a:xfrm>
-            <a:off x="8197424" y="4434689"/>
-            <a:ext cx="3130494" cy="1687451"/>
-          </a:xfrm>
-          <a:prstGeom prst="rect">
-            <a:avLst/>
-          </a:prstGeom>
-        </p:spPr>
-      </p:pic>
-      <p:sp>
-        <p:nvSpPr>
-          <p:cNvPr id="58" name="TextBox 57">
-            <a:extLst>
-              <a:ext uri="{FF2B5EF4-FFF2-40B4-BE49-F238E27FC236}">
-                <a16:creationId xmlns:a16="http://schemas.microsoft.com/office/drawing/2014/main" id="{725BC056-735A-713C-481A-B6C391D9162D}"/>
-              </a:ext>
-            </a:extLst>
-          </p:cNvPr>
-          <p:cNvSpPr txBox="1"/>
-          <p:nvPr/>
-        </p:nvSpPr>
-        <p:spPr>
-          <a:xfrm>
-            <a:off x="8169911" y="4078489"/>
-            <a:ext cx="2246229" cy="307777"/>
-          </a:xfrm>
-          <a:prstGeom prst="rect">
-            <a:avLst/>
-          </a:prstGeom>
-          <a:noFill/>
-        </p:spPr>
-        <p:txBody>
-          <a:bodyPr wrap="square" rtlCol="0">
-            <a:spAutoFit/>
-          </a:bodyPr>
-          <a:lstStyle/>
-          <a:p>
-            <a:r>
-              <a:rPr lang="en-US" sz="1400" b="1" dirty="0">
-                <a:solidFill>
-                  <a:schemeClr val="accent2">
-                    <a:lumMod val="50000"/>
-                  </a:schemeClr>
-                </a:solidFill>
-              </a:rPr>
-              <a:t>Power Grid Monitor HMI</a:t>
-            </a:r>
-            <a:endParaRPr lang="en-SG" sz="1400" b="1" dirty="0">
-              <a:solidFill>
-                <a:schemeClr val="accent2">
-                  <a:lumMod val="50000"/>
-                </a:schemeClr>
-              </a:solidFill>
-            </a:endParaRPr>
-          </a:p>
-        </p:txBody>
-      </p:sp>
-      <p:sp>
-        <p:nvSpPr>
-          <p:cNvPr id="114" name="Rectangle 113">
-            <a:extLst>
-              <a:ext uri="{FF2B5EF4-FFF2-40B4-BE49-F238E27FC236}">
-                <a16:creationId xmlns:a16="http://schemas.microsoft.com/office/drawing/2014/main" id="{61ABEA43-1B13-4EFD-A074-E00CE4C34EC6}"/>
-              </a:ext>
-            </a:extLst>
-          </p:cNvPr>
-          <p:cNvSpPr/>
-          <p:nvPr/>
-        </p:nvSpPr>
-        <p:spPr>
-          <a:xfrm>
-            <a:off x="7861407" y="3430221"/>
-            <a:ext cx="965256" cy="340962"/>
-          </a:xfrm>
-          <a:prstGeom prst="rect">
-            <a:avLst/>
-          </a:prstGeom>
-          <a:solidFill>
-            <a:schemeClr val="accent2"/>
-          </a:solidFill>
-        </p:spPr>
-        <p:style>
-          <a:lnRef idx="2">
-            <a:schemeClr val="accent1">
-              <a:shade val="50000"/>
-            </a:schemeClr>
-          </a:lnRef>
-          <a:fillRef idx="1">
-            <a:schemeClr val="accent1"/>
-          </a:fillRef>
-          <a:effectRef idx="0">
-            <a:schemeClr val="accent1"/>
-          </a:effectRef>
-          <a:fontRef idx="minor">
-            <a:schemeClr val="lt1"/>
-          </a:fontRef>
-        </p:style>
-        <p:txBody>
-          <a:bodyPr rtlCol="0" anchor="ctr"/>
-          <a:lstStyle/>
-          <a:p>
-            <a:r>
-              <a:rPr lang="en-SG" sz="1050" b="1" dirty="0"/>
-              <a:t>NDP3 Client</a:t>
-            </a:r>
-          </a:p>
-        </p:txBody>
-      </p:sp>
-      <p:sp>
-        <p:nvSpPr>
-          <p:cNvPr id="69" name="Rectangle 68">
-            <a:extLst>
-              <a:ext uri="{FF2B5EF4-FFF2-40B4-BE49-F238E27FC236}">
-                <a16:creationId xmlns:a16="http://schemas.microsoft.com/office/drawing/2014/main" id="{B2807C64-6BDD-E03B-B66B-D78BC0AFF245}"/>
-              </a:ext>
-            </a:extLst>
-          </p:cNvPr>
-          <p:cNvSpPr/>
-          <p:nvPr/>
-        </p:nvSpPr>
-        <p:spPr>
-          <a:xfrm>
-            <a:off x="7897351" y="5885904"/>
-            <a:ext cx="965256" cy="340962"/>
-          </a:xfrm>
-          <a:prstGeom prst="rect">
-            <a:avLst/>
-          </a:prstGeom>
-          <a:solidFill>
-            <a:schemeClr val="accent2"/>
-          </a:solidFill>
-        </p:spPr>
-        <p:style>
-          <a:lnRef idx="2">
-            <a:schemeClr val="accent1">
-              <a:shade val="50000"/>
-            </a:schemeClr>
-          </a:lnRef>
-          <a:fillRef idx="1">
-            <a:schemeClr val="accent1"/>
-          </a:fillRef>
-          <a:effectRef idx="0">
-            <a:schemeClr val="accent1"/>
-          </a:effectRef>
-          <a:fontRef idx="minor">
-            <a:schemeClr val="lt1"/>
-          </a:fontRef>
-        </p:style>
-        <p:txBody>
-          <a:bodyPr rtlCol="0" anchor="ctr"/>
-          <a:lstStyle/>
-          <a:p>
-            <a:r>
-              <a:rPr lang="en-SG" sz="1050" b="1" dirty="0"/>
-              <a:t>NDP3 Client</a:t>
-            </a:r>
-          </a:p>
-        </p:txBody>
-      </p:sp>
-      <p:cxnSp>
-        <p:nvCxnSpPr>
-          <p:cNvPr id="71" name="Straight Arrow Connector 70">
-            <a:extLst>
-              <a:ext uri="{FF2B5EF4-FFF2-40B4-BE49-F238E27FC236}">
-                <a16:creationId xmlns:a16="http://schemas.microsoft.com/office/drawing/2014/main" id="{3B5D73E1-A9F8-4E93-9F38-AA246A882528}"/>
-              </a:ext>
-            </a:extLst>
-          </p:cNvPr>
-          <p:cNvCxnSpPr/>
-          <p:nvPr/>
-        </p:nvCxnSpPr>
-        <p:spPr>
-          <a:xfrm>
-            <a:off x="7288236" y="4398908"/>
-            <a:ext cx="0" cy="1335395"/>
-          </a:xfrm>
-          <a:prstGeom prst="straightConnector1">
-            <a:avLst/>
-          </a:prstGeom>
-          <a:ln>
-            <a:tailEnd type="triangle"/>
-          </a:ln>
-        </p:spPr>
-        <p:style>
-          <a:lnRef idx="2">
-            <a:schemeClr val="accent1"/>
-          </a:lnRef>
-          <a:fillRef idx="0">
-            <a:schemeClr val="accent1"/>
-          </a:fillRef>
-          <a:effectRef idx="1">
-            <a:schemeClr val="accent1"/>
-          </a:effectRef>
-          <a:fontRef idx="minor">
-            <a:schemeClr val="tx1"/>
-          </a:fontRef>
-        </p:style>
-      </p:cxnSp>
-      <p:cxnSp>
-        <p:nvCxnSpPr>
-          <p:cNvPr id="76" name="Connector: Elbow 75">
-            <a:extLst>
-              <a:ext uri="{FF2B5EF4-FFF2-40B4-BE49-F238E27FC236}">
-                <a16:creationId xmlns:a16="http://schemas.microsoft.com/office/drawing/2014/main" id="{7B5D3507-6E33-9968-2C7E-318FC59404B4}"/>
-              </a:ext>
-            </a:extLst>
-          </p:cNvPr>
-          <p:cNvCxnSpPr>
-            <a:stCxn id="69" idx="1"/>
-            <a:endCxn id="29" idx="3"/>
-          </p:cNvCxnSpPr>
-          <p:nvPr/>
-        </p:nvCxnSpPr>
-        <p:spPr>
-          <a:xfrm rot="10800000">
-            <a:off x="7474609" y="5927507"/>
-            <a:ext cx="422743" cy="128878"/>
-          </a:xfrm>
-          <a:prstGeom prst="bentConnector3">
-            <a:avLst/>
-          </a:prstGeom>
-          <a:ln>
-            <a:tailEnd type="triangle"/>
-          </a:ln>
-        </p:spPr>
-        <p:style>
-          <a:lnRef idx="2">
-            <a:schemeClr val="accent1"/>
-          </a:lnRef>
-          <a:fillRef idx="0">
-            <a:schemeClr val="accent1"/>
-          </a:fillRef>
-          <a:effectRef idx="1">
-            <a:schemeClr val="accent1"/>
-          </a:effectRef>
-          <a:fontRef idx="minor">
-            <a:schemeClr val="tx1"/>
-          </a:fontRef>
-        </p:style>
-      </p:cxnSp>
-      <p:cxnSp>
-        <p:nvCxnSpPr>
-          <p:cNvPr id="77" name="Connector: Elbow 76">
-            <a:extLst>
-              <a:ext uri="{FF2B5EF4-FFF2-40B4-BE49-F238E27FC236}">
-                <a16:creationId xmlns:a16="http://schemas.microsoft.com/office/drawing/2014/main" id="{1950D1BE-0348-1EA5-13D9-AA2199C3792C}"/>
-              </a:ext>
-            </a:extLst>
-          </p:cNvPr>
-          <p:cNvCxnSpPr>
-            <a:cxnSpLocks/>
-            <a:stCxn id="69" idx="1"/>
-            <a:endCxn id="81" idx="3"/>
-          </p:cNvCxnSpPr>
-          <p:nvPr/>
-        </p:nvCxnSpPr>
-        <p:spPr>
-          <a:xfrm rot="10800000">
-            <a:off x="7474609" y="3751853"/>
-            <a:ext cx="422743" cy="2304533"/>
-          </a:xfrm>
-          <a:prstGeom prst="bentConnector3">
-            <a:avLst>
-              <a:gd name="adj1" fmla="val 50000"/>
-            </a:avLst>
-          </a:prstGeom>
-          <a:ln>
-            <a:tailEnd type="triangle"/>
-          </a:ln>
-        </p:spPr>
-        <p:style>
-          <a:lnRef idx="2">
-            <a:schemeClr val="accent1"/>
-          </a:lnRef>
-          <a:fillRef idx="0">
-            <a:schemeClr val="accent1"/>
-          </a:fillRef>
-          <a:effectRef idx="1">
-            <a:schemeClr val="accent1"/>
-          </a:effectRef>
-          <a:fontRef idx="minor">
-            <a:schemeClr val="tx1"/>
-          </a:fontRef>
-        </p:style>
-      </p:cxnSp>
-      <p:cxnSp>
-        <p:nvCxnSpPr>
-          <p:cNvPr id="99" name="Straight Arrow Connector 98">
-            <a:extLst>
-              <a:ext uri="{FF2B5EF4-FFF2-40B4-BE49-F238E27FC236}">
-                <a16:creationId xmlns:a16="http://schemas.microsoft.com/office/drawing/2014/main" id="{6FEA84D2-D10D-7D77-65C4-5A54F058D84C}"/>
-              </a:ext>
-            </a:extLst>
-          </p:cNvPr>
-          <p:cNvCxnSpPr>
-            <a:stCxn id="114" idx="1"/>
-          </p:cNvCxnSpPr>
-          <p:nvPr/>
-        </p:nvCxnSpPr>
-        <p:spPr>
-          <a:xfrm flipH="1" flipV="1">
-            <a:off x="7490035" y="3599698"/>
-            <a:ext cx="371372" cy="1004"/>
-          </a:xfrm>
-          <a:prstGeom prst="straightConnector1">
-            <a:avLst/>
-          </a:prstGeom>
-          <a:ln>
-            <a:tailEnd type="triangle"/>
-          </a:ln>
-        </p:spPr>
-        <p:style>
-          <a:lnRef idx="2">
-            <a:schemeClr val="accent1"/>
-          </a:lnRef>
-          <a:fillRef idx="0">
-            <a:schemeClr val="accent1"/>
-          </a:fillRef>
-          <a:effectRef idx="1">
-            <a:schemeClr val="accent1"/>
-          </a:effectRef>
-          <a:fontRef idx="minor">
-            <a:schemeClr val="tx1"/>
-          </a:fontRef>
-        </p:style>
-      </p:cxnSp>
     </p:spTree>
     <p:extLst>
       <p:ext uri="{BB962C8B-B14F-4D97-AF65-F5344CB8AC3E}">
-        <p14:creationId xmlns:p14="http://schemas.microsoft.com/office/powerpoint/2010/main" val="1693198638"/>
+        <p14:creationId xmlns:p14="http://schemas.microsoft.com/office/powerpoint/2010/main" val="4062452534"/>
       </p:ext>
     </p:extLst>
   </p:cSld>

--- a/DNP3_PLC_Simulator/doc/img/designDoc.pptx
+++ b/DNP3_PLC_Simulator/doc/img/designDoc.pptx
@@ -5639,8 +5639,8 @@
         </p:nvSpPr>
         <p:spPr>
           <a:xfrm>
-            <a:off x="562555" y="907481"/>
-            <a:ext cx="10759373" cy="461665"/>
+            <a:off x="562555" y="594531"/>
+            <a:ext cx="10759373" cy="830997"/>
           </a:xfrm>
           <a:prstGeom prst="rect">
             <a:avLst/>
@@ -5661,7 +5661,7 @@
           <a:p>
             <a:r>
               <a:rPr lang="en-US" sz="2400" b="1" dirty="0"/>
-              <a:t>Python Virtual RTU Simulator With IEEE 1815-2021 DNP3.0 Comm Protocol</a:t>
+              <a:t>Python Virtual RTU Simulator With IEEE 1815-2021 DNP3.0 Communication  Protocol and Integrate with PowerGrid Generator Cyber Twin System</a:t>
             </a:r>
             <a:endParaRPr lang="en-SG" sz="2400" b="1" dirty="0"/>
           </a:p>
